--- a/output/wordlabs-quick-3day.pptx
+++ b/output/wordlabs-quick-3day.pptx
@@ -4240,7 +4240,7 @@
                 <a:ea typeface="Calibri" pitchFamily="34" charset="-122"/>
                 <a:cs typeface="Calibri" pitchFamily="34" charset="-120"/>
               </a:rPr>
-              <a:t>"fast, speedy, swift"</a:t>
+              <a:t>"fast, speedy, done rapidly"</a:t>
             </a:r>
             <a:endParaRPr lang="en-US" sz="2200" dirty="0"/>
           </a:p>
@@ -4279,7 +4279,7 @@
                 <a:ea typeface="Calibri" pitchFamily="34" charset="-122"/>
                 <a:cs typeface="Calibri" pitchFamily="34" charset="-120"/>
               </a:rPr>
-              <a:t>Origin: Old English: cwic</a:t>
+              <a:t>Origin: Latin: vivus</a:t>
             </a:r>
             <a:endParaRPr lang="en-US" sz="1300" dirty="0"/>
           </a:p>
@@ -5288,7 +5288,7 @@
                 <a:ea typeface="Calibri" pitchFamily="34" charset="-122"/>
                 <a:cs typeface="Calibri" pitchFamily="34" charset="-120"/>
               </a:rPr>
-              <a:t>Word Labs  •  wordlabs.app  •  Root: 'quick' = fast, speedy, swift</a:t>
+              <a:t>Word Labs  •  wordlabs.app  •  Root: 'quick' = fast, speedy, done rapidly</a:t>
             </a:r>
             <a:endParaRPr lang="en-US" sz="800" dirty="0"/>
           </a:p>
@@ -5622,7 +5622,7 @@
                 <a:ea typeface="Trebuchet MS" pitchFamily="34" charset="-122"/>
                 <a:cs typeface="Trebuchet MS" pitchFamily="34" charset="-120"/>
               </a:rPr>
-              <a:t>1</a:t>
+              <a:t>0</a:t>
             </a:r>
             <a:pPr algn="ctr" indent="0" marL="0">
               <a:buNone/>
@@ -5928,7 +5928,7 @@
                 <a:ea typeface="Calibri" pitchFamily="34" charset="-122"/>
                 <a:cs typeface="Calibri" pitchFamily="34" charset="-120"/>
               </a:rPr>
-              <a:t>Word Labs  •  wordlabs.app  •  Root: 'quick' = fast, speedy, swift</a:t>
+              <a:t>Word Labs  •  wordlabs.app  •  Root: 'quick' = fast, speedy, done rapidly</a:t>
             </a:r>
             <a:endParaRPr lang="en-US" sz="800" dirty="0"/>
           </a:p>
@@ -6040,7 +6040,7 @@
                 <a:ea typeface="Calibri" pitchFamily="34" charset="-122"/>
                 <a:cs typeface="Calibri" pitchFamily="34" charset="-120"/>
               </a:rPr>
-              <a:t>She finished her work </a:t>
+              <a:t>The </a:t>
             </a:r>
             <a:pPr algn="l" indent="0" marL="0">
               <a:buNone/>
@@ -6057,7 +6057,7 @@
                 <a:ea typeface="Calibri" pitchFamily="34" charset="-122"/>
                 <a:cs typeface="Calibri" pitchFamily="34" charset="-120"/>
               </a:rPr>
-              <a:t>quickly</a:t>
+              <a:t>quickest</a:t>
             </a:r>
             <a:pPr algn="l" indent="0" marL="0">
               <a:buNone/>
@@ -6071,7 +6071,7 @@
                 <a:ea typeface="Calibri" pitchFamily="34" charset="-122"/>
                 <a:cs typeface="Calibri" pitchFamily="34" charset="-120"/>
               </a:rPr>
-              <a:t>, so her </a:t>
+              <a:t> route through the bush was chosen because we needed to move </a:t>
             </a:r>
             <a:pPr algn="l" indent="0" marL="0">
               <a:buNone/>
@@ -6088,7 +6088,7 @@
                 <a:ea typeface="Calibri" pitchFamily="34" charset="-122"/>
                 <a:cs typeface="Calibri" pitchFamily="34" charset="-120"/>
               </a:rPr>
-              <a:t>quickness</a:t>
+              <a:t>quickly</a:t>
             </a:r>
             <a:pPr algn="l" indent="0" marL="0">
               <a:buNone/>
@@ -6102,7 +6102,7 @@
                 <a:ea typeface="Calibri" pitchFamily="34" charset="-122"/>
                 <a:cs typeface="Calibri" pitchFamily="34" charset="-120"/>
               </a:rPr>
-              <a:t> surprised the whole class!</a:t>
+              <a:t> before the storm arrived.</a:t>
             </a:r>
             <a:endParaRPr lang="en-US" sz="1800" dirty="0"/>
           </a:p>
@@ -6257,7 +6257,7 @@
                 <a:ea typeface="Trebuchet MS" pitchFamily="34" charset="-122"/>
                 <a:cs typeface="Trebuchet MS" pitchFamily="34" charset="-120"/>
               </a:rPr>
-              <a:t>quickly</a:t>
+              <a:t>quickest</a:t>
             </a:r>
             <a:endParaRPr lang="en-US" sz="1400" dirty="0"/>
           </a:p>
@@ -6385,7 +6385,7 @@
                 <a:ea typeface="Trebuchet MS" pitchFamily="34" charset="-122"/>
                 <a:cs typeface="Trebuchet MS" pitchFamily="34" charset="-120"/>
               </a:rPr>
-              <a:t>quickness</a:t>
+              <a:t>quickly</a:t>
             </a:r>
             <a:endParaRPr lang="en-US" sz="1400" dirty="0"/>
           </a:p>
@@ -6716,7 +6716,7 @@
                 <a:ea typeface="Calibri" pitchFamily="34" charset="-122"/>
                 <a:cs typeface="Calibri" pitchFamily="34" charset="-120"/>
               </a:rPr>
-              <a:t>Word Labs  •  wordlabs.app  •  Root: 'quick' = fast, speedy, swift</a:t>
+              <a:t>Word Labs  •  wordlabs.app  •  Root: 'quick' = fast, speedy, done rapidly</a:t>
             </a:r>
             <a:endParaRPr lang="en-US" sz="800" dirty="0"/>
           </a:p>
@@ -6855,7 +6855,7 @@
                 <a:ea typeface="Trebuchet MS" pitchFamily="34" charset="-122"/>
                 <a:cs typeface="Trebuchet MS" pitchFamily="34" charset="-120"/>
               </a:rPr>
-              <a:t>quickly</a:t>
+              <a:t>quickest</a:t>
             </a:r>
             <a:endParaRPr lang="en-US" sz="2800" dirty="0"/>
           </a:p>
@@ -7543,7 +7543,7 @@
                 <a:ea typeface="Calibri" pitchFamily="34" charset="-122"/>
                 <a:cs typeface="Calibri" pitchFamily="34" charset="-120"/>
               </a:rPr>
-              <a:t>Word Labs  •  wordlabs.app  •  Root: 'quick' = fast, speedy, swift</a:t>
+              <a:t>Word Labs  •  wordlabs.app  •  Root: 'quick' = fast, speedy, done rapidly</a:t>
             </a:r>
             <a:endParaRPr lang="en-US" sz="800" dirty="0"/>
           </a:p>
@@ -7682,7 +7682,7 @@
                 <a:ea typeface="Trebuchet MS" pitchFamily="34" charset="-122"/>
                 <a:cs typeface="Trebuchet MS" pitchFamily="34" charset="-120"/>
               </a:rPr>
-              <a:t>quickly</a:t>
+              <a:t>quickest</a:t>
             </a:r>
             <a:endParaRPr lang="en-US" sz="2800" dirty="0"/>
           </a:p>
@@ -7933,7 +7933,7 @@
                 <a:ea typeface="Trebuchet MS" pitchFamily="34" charset="-122"/>
                 <a:cs typeface="Trebuchet MS" pitchFamily="34" charset="-120"/>
               </a:rPr>
-              <a:t>ly</a:t>
+              <a:t>est</a:t>
             </a:r>
             <a:endParaRPr lang="en-US" sz="1300" dirty="0"/>
           </a:p>
@@ -7972,7 +7972,7 @@
                 <a:ea typeface="Calibri" pitchFamily="34" charset="-122"/>
                 <a:cs typeface="Calibri" pitchFamily="34" charset="-120"/>
               </a:rPr>
-              <a:t>in a certain way</a:t>
+              <a:t>the most</a:t>
             </a:r>
             <a:endParaRPr lang="en-US" sz="850" dirty="0"/>
           </a:p>
@@ -8528,7 +8528,7 @@
                 <a:ea typeface="Calibri" pitchFamily="34" charset="-122"/>
                 <a:cs typeface="Calibri" pitchFamily="34" charset="-120"/>
               </a:rPr>
-              <a:t>Word Labs  •  wordlabs.app  •  Root: 'quick' = fast, speedy, swift</a:t>
+              <a:t>Word Labs  •  wordlabs.app  •  Root: 'quick' = fast, speedy, done rapidly</a:t>
             </a:r>
             <a:endParaRPr lang="en-US" sz="800" dirty="0"/>
           </a:p>
@@ -8667,7 +8667,7 @@
                 <a:ea typeface="Trebuchet MS" pitchFamily="34" charset="-122"/>
                 <a:cs typeface="Trebuchet MS" pitchFamily="34" charset="-120"/>
               </a:rPr>
-              <a:t>quickly</a:t>
+              <a:t>quickest</a:t>
             </a:r>
             <a:endParaRPr lang="en-US" sz="2800" dirty="0"/>
           </a:p>
@@ -8918,7 +8918,7 @@
                 <a:ea typeface="Trebuchet MS" pitchFamily="34" charset="-122"/>
                 <a:cs typeface="Trebuchet MS" pitchFamily="34" charset="-120"/>
               </a:rPr>
-              <a:t>ly</a:t>
+              <a:t>est</a:t>
             </a:r>
             <a:endParaRPr lang="en-US" sz="1300" dirty="0"/>
           </a:p>
@@ -8957,7 +8957,7 @@
                 <a:ea typeface="Calibri" pitchFamily="34" charset="-122"/>
                 <a:cs typeface="Calibri" pitchFamily="34" charset="-120"/>
               </a:rPr>
-              <a:t>in a certain way</a:t>
+              <a:t>the most</a:t>
             </a:r>
             <a:endParaRPr lang="en-US" sz="850" dirty="0"/>
           </a:p>
@@ -9221,7 +9221,7 @@
                 <a:ea typeface="Trebuchet MS" pitchFamily="34" charset="-122"/>
                 <a:cs typeface="Trebuchet MS" pitchFamily="34" charset="-120"/>
               </a:rPr>
-              <a:t>ly</a:t>
+              <a:t>est</a:t>
             </a:r>
             <a:endParaRPr lang="en-US" sz="1400" dirty="0"/>
           </a:p>
@@ -9645,7 +9645,7 @@
                 <a:ea typeface="Calibri" pitchFamily="34" charset="-122"/>
                 <a:cs typeface="Calibri" pitchFamily="34" charset="-120"/>
               </a:rPr>
-              <a:t>Word Labs  •  wordlabs.app  •  Root: 'quick' = fast, speedy, swift</a:t>
+              <a:t>Word Labs  •  wordlabs.app  •  Root: 'quick' = fast, speedy, done rapidly</a:t>
             </a:r>
             <a:endParaRPr lang="en-US" sz="800" dirty="0"/>
           </a:p>
@@ -9784,7 +9784,7 @@
                 <a:ea typeface="Trebuchet MS" pitchFamily="34" charset="-122"/>
                 <a:cs typeface="Trebuchet MS" pitchFamily="34" charset="-120"/>
               </a:rPr>
-              <a:t>quickly</a:t>
+              <a:t>quickest</a:t>
             </a:r>
             <a:endParaRPr lang="en-US" sz="2800" dirty="0"/>
           </a:p>
@@ -10035,7 +10035,7 @@
                 <a:ea typeface="Trebuchet MS" pitchFamily="34" charset="-122"/>
                 <a:cs typeface="Trebuchet MS" pitchFamily="34" charset="-120"/>
               </a:rPr>
-              <a:t>ly</a:t>
+              <a:t>est</a:t>
             </a:r>
             <a:endParaRPr lang="en-US" sz="1300" dirty="0"/>
           </a:p>
@@ -10074,7 +10074,7 @@
                 <a:ea typeface="Calibri" pitchFamily="34" charset="-122"/>
                 <a:cs typeface="Calibri" pitchFamily="34" charset="-120"/>
               </a:rPr>
-              <a:t>in a certain way</a:t>
+              <a:t>the most</a:t>
             </a:r>
             <a:endParaRPr lang="en-US" sz="850" dirty="0"/>
           </a:p>
@@ -10338,7 +10338,7 @@
                 <a:ea typeface="Trebuchet MS" pitchFamily="34" charset="-122"/>
                 <a:cs typeface="Trebuchet MS" pitchFamily="34" charset="-120"/>
               </a:rPr>
-              <a:t>ly</a:t>
+              <a:t>est</a:t>
             </a:r>
             <a:endParaRPr lang="en-US" sz="1400" dirty="0"/>
           </a:p>
@@ -10445,7 +10445,7 @@
         </p:nvSpPr>
         <p:spPr>
           <a:xfrm>
-            <a:off x="2427732" y="4169664"/>
+            <a:off x="2254649" y="4169664"/>
             <a:ext cx="685800" cy="384048"/>
           </a:xfrm>
           <a:prstGeom prst="rect">
@@ -10472,7 +10472,7 @@
         </p:nvSpPr>
         <p:spPr>
           <a:xfrm>
-            <a:off x="2427732" y="4169664"/>
+            <a:off x="2254649" y="4169664"/>
             <a:ext cx="685800" cy="384048"/>
           </a:xfrm>
           <a:prstGeom prst="rect">
@@ -10511,7 +10511,7 @@
         </p:nvSpPr>
         <p:spPr>
           <a:xfrm>
-            <a:off x="2427732" y="4572000"/>
+            <a:off x="2254649" y="4572000"/>
             <a:ext cx="685800" cy="219456"/>
           </a:xfrm>
           <a:prstGeom prst="rect">
@@ -10550,7 +10550,7 @@
         </p:nvSpPr>
         <p:spPr>
           <a:xfrm>
-            <a:off x="3639312" y="4169664"/>
+            <a:off x="3293146" y="4169664"/>
             <a:ext cx="685800" cy="384048"/>
           </a:xfrm>
           <a:prstGeom prst="rect">
@@ -10577,7 +10577,7 @@
         </p:nvSpPr>
         <p:spPr>
           <a:xfrm>
-            <a:off x="3639312" y="4169664"/>
+            <a:off x="3293146" y="4169664"/>
             <a:ext cx="685800" cy="384048"/>
           </a:xfrm>
           <a:prstGeom prst="rect">
@@ -10616,7 +10616,7 @@
         </p:nvSpPr>
         <p:spPr>
           <a:xfrm>
-            <a:off x="4850892" y="4169664"/>
+            <a:off x="4331643" y="4169664"/>
             <a:ext cx="685800" cy="384048"/>
           </a:xfrm>
           <a:prstGeom prst="rect">
@@ -10643,7 +10643,7 @@
         </p:nvSpPr>
         <p:spPr>
           <a:xfrm>
-            <a:off x="4850892" y="4169664"/>
+            <a:off x="4331643" y="4169664"/>
             <a:ext cx="685800" cy="384048"/>
           </a:xfrm>
           <a:prstGeom prst="rect">
@@ -10676,13 +10676,52 @@
       </p:sp>
       <p:sp>
         <p:nvSpPr>
-          <p:cNvPr id="40" name="Shape 38"/>
-          <p:cNvSpPr/>
-          <p:nvPr/>
-        </p:nvSpPr>
-        <p:spPr>
-          <a:xfrm>
-            <a:off x="6062472" y="4169664"/>
+          <p:cNvPr id="40" name="Text 38"/>
+          <p:cNvSpPr/>
+          <p:nvPr/>
+        </p:nvSpPr>
+        <p:spPr>
+          <a:xfrm>
+            <a:off x="4331643" y="4572000"/>
+            <a:ext cx="685800" cy="219456"/>
+          </a:xfrm>
+          <a:prstGeom prst="rect">
+            <a:avLst/>
+          </a:prstGeom>
+          <a:noFill/>
+          <a:ln/>
+        </p:spPr>
+        <p:txBody>
+          <a:bodyPr wrap="square" lIns="0" tIns="0" rIns="0" bIns="0" rtlCol="0" anchor="t"/>
+          <a:lstStyle/>
+          <a:p>
+            <a:pPr algn="ctr" indent="0" marL="0">
+              <a:buNone/>
+            </a:pPr>
+            <a:r>
+              <a:rPr lang="en-US" sz="750" i="1" dirty="0">
+                <a:solidFill>
+                  <a:srgbClr val="94A3B8"/>
+                </a:solidFill>
+                <a:latin typeface="Calibri" pitchFamily="34" charset="0"/>
+                <a:ea typeface="Calibri" pitchFamily="34" charset="-122"/>
+                <a:cs typeface="Calibri" pitchFamily="34" charset="-120"/>
+              </a:rPr>
+              <a:t>/k/</a:t>
+            </a:r>
+            <a:endParaRPr lang="en-US" sz="750" dirty="0"/>
+          </a:p>
+        </p:txBody>
+      </p:sp>
+      <p:sp>
+        <p:nvSpPr>
+          <p:cNvPr id="41" name="Shape 39"/>
+          <p:cNvSpPr/>
+          <p:nvPr/>
+        </p:nvSpPr>
+        <p:spPr>
+          <a:xfrm>
+            <a:off x="5370141" y="4169664"/>
             <a:ext cx="685800" cy="384048"/>
           </a:xfrm>
           <a:prstGeom prst="rect">
@@ -10703,13 +10742,13 @@
       </p:sp>
       <p:sp>
         <p:nvSpPr>
-          <p:cNvPr id="41" name="Text 39"/>
-          <p:cNvSpPr/>
-          <p:nvPr/>
-        </p:nvSpPr>
-        <p:spPr>
-          <a:xfrm>
-            <a:off x="6062472" y="4169664"/>
+          <p:cNvPr id="42" name="Text 40"/>
+          <p:cNvSpPr/>
+          <p:nvPr/>
+        </p:nvSpPr>
+        <p:spPr>
+          <a:xfrm>
+            <a:off x="5370141" y="4169664"/>
             <a:ext cx="685800" cy="384048"/>
           </a:xfrm>
           <a:prstGeom prst="rect">
@@ -10734,7 +10773,7 @@
                 <a:ea typeface="Trebuchet MS" pitchFamily="34" charset="-122"/>
                 <a:cs typeface="Trebuchet MS" pitchFamily="34" charset="-120"/>
               </a:rPr>
-              <a:t>l</a:t>
+              <a:t>e</a:t>
             </a:r>
             <a:endParaRPr lang="en-US" sz="900" dirty="0"/>
           </a:p>
@@ -10742,13 +10781,13 @@
       </p:sp>
       <p:sp>
         <p:nvSpPr>
-          <p:cNvPr id="42" name="Shape 40"/>
-          <p:cNvSpPr/>
-          <p:nvPr/>
-        </p:nvSpPr>
-        <p:spPr>
-          <a:xfrm>
-            <a:off x="7274052" y="4169664"/>
+          <p:cNvPr id="43" name="Shape 41"/>
+          <p:cNvSpPr/>
+          <p:nvPr/>
+        </p:nvSpPr>
+        <p:spPr>
+          <a:xfrm>
+            <a:off x="6408638" y="4169664"/>
             <a:ext cx="685800" cy="384048"/>
           </a:xfrm>
           <a:prstGeom prst="rect">
@@ -10769,13 +10808,13 @@
       </p:sp>
       <p:sp>
         <p:nvSpPr>
-          <p:cNvPr id="43" name="Text 41"/>
-          <p:cNvSpPr/>
-          <p:nvPr/>
-        </p:nvSpPr>
-        <p:spPr>
-          <a:xfrm>
-            <a:off x="7274052" y="4169664"/>
+          <p:cNvPr id="44" name="Text 42"/>
+          <p:cNvSpPr/>
+          <p:nvPr/>
+        </p:nvSpPr>
+        <p:spPr>
+          <a:xfrm>
+            <a:off x="6408638" y="4169664"/>
             <a:ext cx="685800" cy="384048"/>
           </a:xfrm>
           <a:prstGeom prst="rect">
@@ -10800,7 +10839,73 @@
                 <a:ea typeface="Trebuchet MS" pitchFamily="34" charset="-122"/>
                 <a:cs typeface="Trebuchet MS" pitchFamily="34" charset="-120"/>
               </a:rPr>
-              <a:t>y</a:t>
+              <a:t>s</a:t>
+            </a:r>
+            <a:endParaRPr lang="en-US" sz="900" dirty="0"/>
+          </a:p>
+        </p:txBody>
+      </p:sp>
+      <p:sp>
+        <p:nvSpPr>
+          <p:cNvPr id="45" name="Shape 43"/>
+          <p:cNvSpPr/>
+          <p:nvPr/>
+        </p:nvSpPr>
+        <p:spPr>
+          <a:xfrm>
+            <a:off x="7447135" y="4169664"/>
+            <a:ext cx="685800" cy="384048"/>
+          </a:xfrm>
+          <a:prstGeom prst="rect">
+            <a:avLst>
+              <a:gd name="adj" fmla="val 9524"/>
+            </a:avLst>
+          </a:prstGeom>
+          <a:solidFill>
+            <a:srgbClr val="FFFFFF"/>
+          </a:solidFill>
+          <a:ln w="12700">
+            <a:solidFill>
+              <a:srgbClr val="DB2777"/>
+            </a:solidFill>
+            <a:prstDash val="solid"/>
+          </a:ln>
+        </p:spPr>
+      </p:sp>
+      <p:sp>
+        <p:nvSpPr>
+          <p:cNvPr id="46" name="Text 44"/>
+          <p:cNvSpPr/>
+          <p:nvPr/>
+        </p:nvSpPr>
+        <p:spPr>
+          <a:xfrm>
+            <a:off x="7447135" y="4169664"/>
+            <a:ext cx="685800" cy="384048"/>
+          </a:xfrm>
+          <a:prstGeom prst="rect">
+            <a:avLst/>
+          </a:prstGeom>
+          <a:noFill/>
+          <a:ln/>
+        </p:spPr>
+        <p:txBody>
+          <a:bodyPr wrap="square" lIns="0" tIns="0" rIns="0" bIns="0" rtlCol="0" anchor="ctr"/>
+          <a:lstStyle/>
+          <a:p>
+            <a:pPr algn="ctr" indent="0" marL="0">
+              <a:buNone/>
+            </a:pPr>
+            <a:r>
+              <a:rPr lang="en-US" sz="900" b="1" dirty="0">
+                <a:solidFill>
+                  <a:srgbClr val="9D174D"/>
+                </a:solidFill>
+                <a:latin typeface="Trebuchet MS" pitchFamily="34" charset="0"/>
+                <a:ea typeface="Trebuchet MS" pitchFamily="34" charset="-122"/>
+                <a:cs typeface="Trebuchet MS" pitchFamily="34" charset="-120"/>
+              </a:rPr>
+              <a:t>t</a:t>
             </a:r>
             <a:endParaRPr lang="en-US" sz="900" dirty="0"/>
           </a:p>
@@ -11092,7 +11197,7 @@
                 <a:ea typeface="Calibri" pitchFamily="34" charset="-122"/>
                 <a:cs typeface="Calibri" pitchFamily="34" charset="-120"/>
               </a:rPr>
-              <a:t>Word Labs  •  wordlabs.app  •  Root: 'quick' = fast, speedy, swift</a:t>
+              <a:t>Word Labs  •  wordlabs.app  •  Root: 'quick' = fast, speedy, done rapidly</a:t>
             </a:r>
             <a:endParaRPr lang="en-US" sz="800" dirty="0"/>
           </a:p>
@@ -11231,7 +11336,7 @@
                 <a:ea typeface="Trebuchet MS" pitchFamily="34" charset="-122"/>
                 <a:cs typeface="Trebuchet MS" pitchFamily="34" charset="-120"/>
               </a:rPr>
-              <a:t>quickness</a:t>
+              <a:t>quickly</a:t>
             </a:r>
             <a:endParaRPr lang="en-US" sz="2800" dirty="0"/>
           </a:p>
@@ -11919,7 +12024,7 @@
                 <a:ea typeface="Calibri" pitchFamily="34" charset="-122"/>
                 <a:cs typeface="Calibri" pitchFamily="34" charset="-120"/>
               </a:rPr>
-              <a:t>Word Labs  •  wordlabs.app  •  Root: 'quick' = fast, speedy, swift</a:t>
+              <a:t>Word Labs  •  wordlabs.app  •  Root: 'quick' = fast, speedy, done rapidly</a:t>
             </a:r>
             <a:endParaRPr lang="en-US" sz="800" dirty="0"/>
           </a:p>
@@ -12058,7 +12163,7 @@
                 <a:ea typeface="Trebuchet MS" pitchFamily="34" charset="-122"/>
                 <a:cs typeface="Trebuchet MS" pitchFamily="34" charset="-120"/>
               </a:rPr>
-              <a:t>quickness</a:t>
+              <a:t>quickly</a:t>
             </a:r>
             <a:endParaRPr lang="en-US" sz="2800" dirty="0"/>
           </a:p>
@@ -12309,7 +12414,7 @@
                 <a:ea typeface="Trebuchet MS" pitchFamily="34" charset="-122"/>
                 <a:cs typeface="Trebuchet MS" pitchFamily="34" charset="-120"/>
               </a:rPr>
-              <a:t>ness</a:t>
+              <a:t>ly</a:t>
             </a:r>
             <a:endParaRPr lang="en-US" sz="1300" dirty="0"/>
           </a:p>
@@ -12348,7 +12453,7 @@
                 <a:ea typeface="Calibri" pitchFamily="34" charset="-122"/>
                 <a:cs typeface="Calibri" pitchFamily="34" charset="-120"/>
               </a:rPr>
-              <a:t>state or quality of</a:t>
+              <a:t>in a certain way</a:t>
             </a:r>
             <a:endParaRPr lang="en-US" sz="850" dirty="0"/>
           </a:p>
@@ -12904,7 +13009,7 @@
                 <a:ea typeface="Calibri" pitchFamily="34" charset="-122"/>
                 <a:cs typeface="Calibri" pitchFamily="34" charset="-120"/>
               </a:rPr>
-              <a:t>Word Labs  •  wordlabs.app  •  Root: 'quick' = fast, speedy, swift</a:t>
+              <a:t>Word Labs  •  wordlabs.app  •  Root: 'quick' = fast, speedy, done rapidly</a:t>
             </a:r>
             <a:endParaRPr lang="en-US" sz="800" dirty="0"/>
           </a:p>
@@ -13043,7 +13148,7 @@
                 <a:ea typeface="Trebuchet MS" pitchFamily="34" charset="-122"/>
                 <a:cs typeface="Trebuchet MS" pitchFamily="34" charset="-120"/>
               </a:rPr>
-              <a:t>quickness</a:t>
+              <a:t>quickly</a:t>
             </a:r>
             <a:endParaRPr lang="en-US" sz="2800" dirty="0"/>
           </a:p>
@@ -13294,7 +13399,7 @@
                 <a:ea typeface="Trebuchet MS" pitchFamily="34" charset="-122"/>
                 <a:cs typeface="Trebuchet MS" pitchFamily="34" charset="-120"/>
               </a:rPr>
-              <a:t>ness</a:t>
+              <a:t>ly</a:t>
             </a:r>
             <a:endParaRPr lang="en-US" sz="1300" dirty="0"/>
           </a:p>
@@ -13333,7 +13438,7 @@
                 <a:ea typeface="Calibri" pitchFamily="34" charset="-122"/>
                 <a:cs typeface="Calibri" pitchFamily="34" charset="-120"/>
               </a:rPr>
-              <a:t>state or quality of</a:t>
+              <a:t>in a certain way</a:t>
             </a:r>
             <a:endParaRPr lang="en-US" sz="850" dirty="0"/>
           </a:p>
@@ -13597,7 +13702,7 @@
                 <a:ea typeface="Trebuchet MS" pitchFamily="34" charset="-122"/>
                 <a:cs typeface="Trebuchet MS" pitchFamily="34" charset="-120"/>
               </a:rPr>
-              <a:t>ness</a:t>
+              <a:t>ly</a:t>
             </a:r>
             <a:endParaRPr lang="en-US" sz="1400" dirty="0"/>
           </a:p>
@@ -13930,7 +14035,7 @@
                 <a:ea typeface="Calibri" pitchFamily="34" charset="-122"/>
                 <a:cs typeface="Calibri" pitchFamily="34" charset="-120"/>
               </a:rPr>
-              <a:t>Root 'quick' — fast, speedy, swift</a:t>
+              <a:t>Root 'quick' — fast, speedy, done rapidly</a:t>
             </a:r>
             <a:endParaRPr lang="en-US" sz="1600" dirty="0"/>
           </a:p>
@@ -14286,7 +14391,7 @@
                 <a:ea typeface="Calibri" pitchFamily="34" charset="-122"/>
                 <a:cs typeface="Calibri" pitchFamily="34" charset="-120"/>
               </a:rPr>
-              <a:t>Word Labs  •  wordlabs.app  •  Root: 'quick' = fast, speedy, swift</a:t>
+              <a:t>Word Labs  •  wordlabs.app  •  Root: 'quick' = fast, speedy, done rapidly</a:t>
             </a:r>
             <a:endParaRPr lang="en-US" sz="800" dirty="0"/>
           </a:p>
@@ -14425,7 +14530,7 @@
                 <a:ea typeface="Trebuchet MS" pitchFamily="34" charset="-122"/>
                 <a:cs typeface="Trebuchet MS" pitchFamily="34" charset="-120"/>
               </a:rPr>
-              <a:t>quickness</a:t>
+              <a:t>quickly</a:t>
             </a:r>
             <a:endParaRPr lang="en-US" sz="2800" dirty="0"/>
           </a:p>
@@ -14676,7 +14781,7 @@
                 <a:ea typeface="Trebuchet MS" pitchFamily="34" charset="-122"/>
                 <a:cs typeface="Trebuchet MS" pitchFamily="34" charset="-120"/>
               </a:rPr>
-              <a:t>ness</a:t>
+              <a:t>ly</a:t>
             </a:r>
             <a:endParaRPr lang="en-US" sz="1300" dirty="0"/>
           </a:p>
@@ -14715,7 +14820,7 @@
                 <a:ea typeface="Calibri" pitchFamily="34" charset="-122"/>
                 <a:cs typeface="Calibri" pitchFamily="34" charset="-120"/>
               </a:rPr>
-              <a:t>state or quality of</a:t>
+              <a:t>in a certain way</a:t>
             </a:r>
             <a:endParaRPr lang="en-US" sz="850" dirty="0"/>
           </a:p>
@@ -14979,7 +15084,7 @@
                 <a:ea typeface="Trebuchet MS" pitchFamily="34" charset="-122"/>
                 <a:cs typeface="Trebuchet MS" pitchFamily="34" charset="-120"/>
               </a:rPr>
-              <a:t>ness</a:t>
+              <a:t>ly</a:t>
             </a:r>
             <a:endParaRPr lang="en-US" sz="1400" dirty="0"/>
           </a:p>
@@ -15086,7 +15191,7 @@
         </p:nvSpPr>
         <p:spPr>
           <a:xfrm>
-            <a:off x="2254649" y="4169664"/>
+            <a:off x="2427732" y="4169664"/>
             <a:ext cx="685800" cy="384048"/>
           </a:xfrm>
           <a:prstGeom prst="rect">
@@ -15113,7 +15218,7 @@
         </p:nvSpPr>
         <p:spPr>
           <a:xfrm>
-            <a:off x="2254649" y="4169664"/>
+            <a:off x="2427732" y="4169664"/>
             <a:ext cx="685800" cy="384048"/>
           </a:xfrm>
           <a:prstGeom prst="rect">
@@ -15152,7 +15257,7 @@
         </p:nvSpPr>
         <p:spPr>
           <a:xfrm>
-            <a:off x="2254649" y="4572000"/>
+            <a:off x="2427732" y="4572000"/>
             <a:ext cx="685800" cy="219456"/>
           </a:xfrm>
           <a:prstGeom prst="rect">
@@ -15191,7 +15296,7 @@
         </p:nvSpPr>
         <p:spPr>
           <a:xfrm>
-            <a:off x="3293146" y="4169664"/>
+            <a:off x="3639312" y="4169664"/>
             <a:ext cx="685800" cy="384048"/>
           </a:xfrm>
           <a:prstGeom prst="rect">
@@ -15218,7 +15323,7 @@
         </p:nvSpPr>
         <p:spPr>
           <a:xfrm>
-            <a:off x="3293146" y="4169664"/>
+            <a:off x="3639312" y="4169664"/>
             <a:ext cx="685800" cy="384048"/>
           </a:xfrm>
           <a:prstGeom prst="rect">
@@ -15257,7 +15362,7 @@
         </p:nvSpPr>
         <p:spPr>
           <a:xfrm>
-            <a:off x="4331643" y="4169664"/>
+            <a:off x="4850892" y="4169664"/>
             <a:ext cx="685800" cy="384048"/>
           </a:xfrm>
           <a:prstGeom prst="rect">
@@ -15284,7 +15389,7 @@
         </p:nvSpPr>
         <p:spPr>
           <a:xfrm>
-            <a:off x="4331643" y="4169664"/>
+            <a:off x="4850892" y="4169664"/>
             <a:ext cx="685800" cy="384048"/>
           </a:xfrm>
           <a:prstGeom prst="rect">
@@ -15317,13 +15422,52 @@
       </p:sp>
       <p:sp>
         <p:nvSpPr>
-          <p:cNvPr id="40" name="Shape 38"/>
-          <p:cNvSpPr/>
-          <p:nvPr/>
-        </p:nvSpPr>
-        <p:spPr>
-          <a:xfrm>
-            <a:off x="5370141" y="4169664"/>
+          <p:cNvPr id="40" name="Text 38"/>
+          <p:cNvSpPr/>
+          <p:nvPr/>
+        </p:nvSpPr>
+        <p:spPr>
+          <a:xfrm>
+            <a:off x="4850892" y="4572000"/>
+            <a:ext cx="685800" cy="219456"/>
+          </a:xfrm>
+          <a:prstGeom prst="rect">
+            <a:avLst/>
+          </a:prstGeom>
+          <a:noFill/>
+          <a:ln/>
+        </p:spPr>
+        <p:txBody>
+          <a:bodyPr wrap="square" lIns="0" tIns="0" rIns="0" bIns="0" rtlCol="0" anchor="t"/>
+          <a:lstStyle/>
+          <a:p>
+            <a:pPr algn="ctr" indent="0" marL="0">
+              <a:buNone/>
+            </a:pPr>
+            <a:r>
+              <a:rPr lang="en-US" sz="750" i="1" dirty="0">
+                <a:solidFill>
+                  <a:srgbClr val="94A3B8"/>
+                </a:solidFill>
+                <a:latin typeface="Calibri" pitchFamily="34" charset="0"/>
+                <a:ea typeface="Calibri" pitchFamily="34" charset="-122"/>
+                <a:cs typeface="Calibri" pitchFamily="34" charset="-120"/>
+              </a:rPr>
+              <a:t>/k/</a:t>
+            </a:r>
+            <a:endParaRPr lang="en-US" sz="750" dirty="0"/>
+          </a:p>
+        </p:txBody>
+      </p:sp>
+      <p:sp>
+        <p:nvSpPr>
+          <p:cNvPr id="41" name="Shape 39"/>
+          <p:cNvSpPr/>
+          <p:nvPr/>
+        </p:nvSpPr>
+        <p:spPr>
+          <a:xfrm>
+            <a:off x="6062472" y="4169664"/>
             <a:ext cx="685800" cy="384048"/>
           </a:xfrm>
           <a:prstGeom prst="rect">
@@ -15344,13 +15488,13 @@
       </p:sp>
       <p:sp>
         <p:nvSpPr>
-          <p:cNvPr id="41" name="Text 39"/>
-          <p:cNvSpPr/>
-          <p:nvPr/>
-        </p:nvSpPr>
-        <p:spPr>
-          <a:xfrm>
-            <a:off x="5370141" y="4169664"/>
+          <p:cNvPr id="42" name="Text 40"/>
+          <p:cNvSpPr/>
+          <p:nvPr/>
+        </p:nvSpPr>
+        <p:spPr>
+          <a:xfrm>
+            <a:off x="6062472" y="4169664"/>
             <a:ext cx="685800" cy="384048"/>
           </a:xfrm>
           <a:prstGeom prst="rect">
@@ -15375,7 +15519,7 @@
                 <a:ea typeface="Trebuchet MS" pitchFamily="34" charset="-122"/>
                 <a:cs typeface="Trebuchet MS" pitchFamily="34" charset="-120"/>
               </a:rPr>
-              <a:t>n</a:t>
+              <a:t>l</a:t>
             </a:r>
             <a:endParaRPr lang="en-US" sz="900" dirty="0"/>
           </a:p>
@@ -15383,13 +15527,13 @@
       </p:sp>
       <p:sp>
         <p:nvSpPr>
-          <p:cNvPr id="42" name="Shape 40"/>
-          <p:cNvSpPr/>
-          <p:nvPr/>
-        </p:nvSpPr>
-        <p:spPr>
-          <a:xfrm>
-            <a:off x="6408638" y="4169664"/>
+          <p:cNvPr id="43" name="Shape 41"/>
+          <p:cNvSpPr/>
+          <p:nvPr/>
+        </p:nvSpPr>
+        <p:spPr>
+          <a:xfrm>
+            <a:off x="7274052" y="4169664"/>
             <a:ext cx="685800" cy="384048"/>
           </a:xfrm>
           <a:prstGeom prst="rect">
@@ -15410,13 +15554,13 @@
       </p:sp>
       <p:sp>
         <p:nvSpPr>
-          <p:cNvPr id="43" name="Text 41"/>
-          <p:cNvSpPr/>
-          <p:nvPr/>
-        </p:nvSpPr>
-        <p:spPr>
-          <a:xfrm>
-            <a:off x="6408638" y="4169664"/>
+          <p:cNvPr id="44" name="Text 42"/>
+          <p:cNvSpPr/>
+          <p:nvPr/>
+        </p:nvSpPr>
+        <p:spPr>
+          <a:xfrm>
+            <a:off x="7274052" y="4169664"/>
             <a:ext cx="685800" cy="384048"/>
           </a:xfrm>
           <a:prstGeom prst="rect">
@@ -15441,73 +15585,7 @@
                 <a:ea typeface="Trebuchet MS" pitchFamily="34" charset="-122"/>
                 <a:cs typeface="Trebuchet MS" pitchFamily="34" charset="-120"/>
               </a:rPr>
-              <a:t>e</a:t>
-            </a:r>
-            <a:endParaRPr lang="en-US" sz="900" dirty="0"/>
-          </a:p>
-        </p:txBody>
-      </p:sp>
-      <p:sp>
-        <p:nvSpPr>
-          <p:cNvPr id="44" name="Shape 42"/>
-          <p:cNvSpPr/>
-          <p:nvPr/>
-        </p:nvSpPr>
-        <p:spPr>
-          <a:xfrm>
-            <a:off x="7447135" y="4169664"/>
-            <a:ext cx="685800" cy="384048"/>
-          </a:xfrm>
-          <a:prstGeom prst="rect">
-            <a:avLst>
-              <a:gd name="adj" fmla="val 9524"/>
-            </a:avLst>
-          </a:prstGeom>
-          <a:solidFill>
-            <a:srgbClr val="FFFFFF"/>
-          </a:solidFill>
-          <a:ln w="12700">
-            <a:solidFill>
-              <a:srgbClr val="DB2777"/>
-            </a:solidFill>
-            <a:prstDash val="solid"/>
-          </a:ln>
-        </p:spPr>
-      </p:sp>
-      <p:sp>
-        <p:nvSpPr>
-          <p:cNvPr id="45" name="Text 43"/>
-          <p:cNvSpPr/>
-          <p:nvPr/>
-        </p:nvSpPr>
-        <p:spPr>
-          <a:xfrm>
-            <a:off x="7447135" y="4169664"/>
-            <a:ext cx="685800" cy="384048"/>
-          </a:xfrm>
-          <a:prstGeom prst="rect">
-            <a:avLst/>
-          </a:prstGeom>
-          <a:noFill/>
-          <a:ln/>
-        </p:spPr>
-        <p:txBody>
-          <a:bodyPr wrap="square" lIns="0" tIns="0" rIns="0" bIns="0" rtlCol="0" anchor="ctr"/>
-          <a:lstStyle/>
-          <a:p>
-            <a:pPr algn="ctr" indent="0" marL="0">
-              <a:buNone/>
-            </a:pPr>
-            <a:r>
-              <a:rPr lang="en-US" sz="900" b="1" dirty="0">
-                <a:solidFill>
-                  <a:srgbClr val="9D174D"/>
-                </a:solidFill>
-                <a:latin typeface="Trebuchet MS" pitchFamily="34" charset="0"/>
-                <a:ea typeface="Trebuchet MS" pitchFamily="34" charset="-122"/>
-                <a:cs typeface="Trebuchet MS" pitchFamily="34" charset="-120"/>
-              </a:rPr>
-              <a:t>ss</a:t>
+              <a:t>y</a:t>
             </a:r>
             <a:endParaRPr lang="en-US" sz="900" dirty="0"/>
           </a:p>
@@ -16081,7 +16159,7 @@
                 <a:ea typeface="Calibri" pitchFamily="34" charset="-122"/>
                 <a:cs typeface="Calibri" pitchFamily="34" charset="-120"/>
               </a:rPr>
-              <a:t>Word Labs  •  wordlabs.app  •  Root: 'quick' = fast, speedy, swift</a:t>
+              <a:t>Word Labs  •  wordlabs.app  •  Root: 'quick' = fast, speedy, done rapidly</a:t>
             </a:r>
             <a:endParaRPr lang="en-US" sz="800" dirty="0"/>
           </a:p>
@@ -16721,7 +16799,7 @@
                 <a:ea typeface="Calibri" pitchFamily="34" charset="-122"/>
                 <a:cs typeface="Calibri" pitchFamily="34" charset="-120"/>
               </a:rPr>
-              <a:t>Word Labs  •  wordlabs.app  •  Root: 'quick' = fast, speedy, swift</a:t>
+              <a:t>Word Labs  •  wordlabs.app  •  Root: 'quick' = fast, speedy, done rapidly</a:t>
             </a:r>
             <a:endParaRPr lang="en-US" sz="800" dirty="0"/>
           </a:p>
@@ -16833,7 +16911,7 @@
                 <a:ea typeface="Calibri" pitchFamily="34" charset="-122"/>
                 <a:cs typeface="Calibri" pitchFamily="34" charset="-120"/>
               </a:rPr>
-              <a:t>The </a:t>
+              <a:t>With great </a:t>
             </a:r>
             <a:pPr algn="l" indent="0" marL="0">
               <a:buNone/>
@@ -16850,7 +16928,7 @@
                 <a:ea typeface="Calibri" pitchFamily="34" charset="-122"/>
                 <a:cs typeface="Calibri" pitchFamily="34" charset="-120"/>
               </a:rPr>
-              <a:t>quickest</a:t>
+              <a:t>quickness</a:t>
             </a:r>
             <a:pPr algn="l" indent="0" marL="0">
               <a:buNone/>
@@ -16864,7 +16942,7 @@
                 <a:ea typeface="Calibri" pitchFamily="34" charset="-122"/>
                 <a:cs typeface="Calibri" pitchFamily="34" charset="-120"/>
               </a:rPr>
-              <a:t> runner </a:t>
+              <a:t>, the </a:t>
             </a:r>
             <a:pPr algn="l" indent="0" marL="0">
               <a:buNone/>
@@ -16881,7 +16959,7 @@
                 <a:ea typeface="Calibri" pitchFamily="34" charset="-122"/>
                 <a:cs typeface="Calibri" pitchFamily="34" charset="-120"/>
               </a:rPr>
-              <a:t>quickened</a:t>
+              <a:t>quick-witted</a:t>
             </a:r>
             <a:pPr algn="l" indent="0" marL="0">
               <a:buNone/>
@@ -16895,7 +16973,7 @@
                 <a:ea typeface="Calibri" pitchFamily="34" charset="-122"/>
                 <a:cs typeface="Calibri" pitchFamily="34" charset="-120"/>
               </a:rPr>
-              <a:t> her pace, and she finished more </a:t>
+              <a:t> boy found a solution, and his ability to </a:t>
             </a:r>
             <a:pPr algn="l" indent="0" marL="0">
               <a:buNone/>
@@ -16912,7 +16990,7 @@
                 <a:ea typeface="Calibri" pitchFamily="34" charset="-122"/>
                 <a:cs typeface="Calibri" pitchFamily="34" charset="-120"/>
               </a:rPr>
-              <a:t>quickly</a:t>
+              <a:t>quicken</a:t>
             </a:r>
             <a:pPr algn="l" indent="0" marL="0">
               <a:buNone/>
@@ -16926,7 +17004,7 @@
                 <a:ea typeface="Calibri" pitchFamily="34" charset="-122"/>
                 <a:cs typeface="Calibri" pitchFamily="34" charset="-120"/>
               </a:rPr>
-              <a:t> than anyone expected!</a:t>
+              <a:t> his thinking impressed everyone.</a:t>
             </a:r>
             <a:endParaRPr lang="en-US" sz="1800" dirty="0"/>
           </a:p>
@@ -17081,7 +17159,7 @@
                 <a:ea typeface="Trebuchet MS" pitchFamily="34" charset="-122"/>
                 <a:cs typeface="Trebuchet MS" pitchFamily="34" charset="-120"/>
               </a:rPr>
-              <a:t>quickest</a:t>
+              <a:t>quickness</a:t>
             </a:r>
             <a:endParaRPr lang="en-US" sz="1400" dirty="0"/>
           </a:p>
@@ -17209,7 +17287,7 @@
                 <a:ea typeface="Trebuchet MS" pitchFamily="34" charset="-122"/>
                 <a:cs typeface="Trebuchet MS" pitchFamily="34" charset="-120"/>
               </a:rPr>
-              <a:t>quickened</a:t>
+              <a:t>quick-witted</a:t>
             </a:r>
             <a:endParaRPr lang="en-US" sz="1400" dirty="0"/>
           </a:p>
@@ -17337,7 +17415,7 @@
                 <a:ea typeface="Trebuchet MS" pitchFamily="34" charset="-122"/>
                 <a:cs typeface="Trebuchet MS" pitchFamily="34" charset="-120"/>
               </a:rPr>
-              <a:t>quickly</a:t>
+              <a:t>quicken</a:t>
             </a:r>
             <a:endParaRPr lang="en-US" sz="1400" dirty="0"/>
           </a:p>
@@ -17668,7 +17746,7 @@
                 <a:ea typeface="Calibri" pitchFamily="34" charset="-122"/>
                 <a:cs typeface="Calibri" pitchFamily="34" charset="-120"/>
               </a:rPr>
-              <a:t>Word Labs  •  wordlabs.app  •  Root: 'quick' = fast, speedy, swift</a:t>
+              <a:t>Word Labs  •  wordlabs.app  •  Root: 'quick' = fast, speedy, done rapidly</a:t>
             </a:r>
             <a:endParaRPr lang="en-US" sz="800" dirty="0"/>
           </a:p>
@@ -17807,7 +17885,7 @@
                 <a:ea typeface="Trebuchet MS" pitchFamily="34" charset="-122"/>
                 <a:cs typeface="Trebuchet MS" pitchFamily="34" charset="-120"/>
               </a:rPr>
-              <a:t>quickest</a:t>
+              <a:t>quickness</a:t>
             </a:r>
             <a:endParaRPr lang="en-US" sz="2800" dirty="0"/>
           </a:p>
@@ -18495,7 +18573,7 @@
                 <a:ea typeface="Calibri" pitchFamily="34" charset="-122"/>
                 <a:cs typeface="Calibri" pitchFamily="34" charset="-120"/>
               </a:rPr>
-              <a:t>Word Labs  •  wordlabs.app  •  Root: 'quick' = fast, speedy, swift</a:t>
+              <a:t>Word Labs  •  wordlabs.app  •  Root: 'quick' = fast, speedy, done rapidly</a:t>
             </a:r>
             <a:endParaRPr lang="en-US" sz="800" dirty="0"/>
           </a:p>
@@ -18634,7 +18712,7 @@
                 <a:ea typeface="Trebuchet MS" pitchFamily="34" charset="-122"/>
                 <a:cs typeface="Trebuchet MS" pitchFamily="34" charset="-120"/>
               </a:rPr>
-              <a:t>quickest</a:t>
+              <a:t>quickness</a:t>
             </a:r>
             <a:endParaRPr lang="en-US" sz="2800" dirty="0"/>
           </a:p>
@@ -18885,7 +18963,7 @@
                 <a:ea typeface="Trebuchet MS" pitchFamily="34" charset="-122"/>
                 <a:cs typeface="Trebuchet MS" pitchFamily="34" charset="-120"/>
               </a:rPr>
-              <a:t>est</a:t>
+              <a:t>ness</a:t>
             </a:r>
             <a:endParaRPr lang="en-US" sz="1300" dirty="0"/>
           </a:p>
@@ -18924,7 +19002,7 @@
                 <a:ea typeface="Calibri" pitchFamily="34" charset="-122"/>
                 <a:cs typeface="Calibri" pitchFamily="34" charset="-120"/>
               </a:rPr>
-              <a:t>the most</a:t>
+              <a:t>the state or quality of</a:t>
             </a:r>
             <a:endParaRPr lang="en-US" sz="850" dirty="0"/>
           </a:p>
@@ -19480,7 +19558,7 @@
                 <a:ea typeface="Calibri" pitchFamily="34" charset="-122"/>
                 <a:cs typeface="Calibri" pitchFamily="34" charset="-120"/>
               </a:rPr>
-              <a:t>Word Labs  •  wordlabs.app  •  Root: 'quick' = fast, speedy, swift</a:t>
+              <a:t>Word Labs  •  wordlabs.app  •  Root: 'quick' = fast, speedy, done rapidly</a:t>
             </a:r>
             <a:endParaRPr lang="en-US" sz="800" dirty="0"/>
           </a:p>
@@ -19619,7 +19697,7 @@
                 <a:ea typeface="Trebuchet MS" pitchFamily="34" charset="-122"/>
                 <a:cs typeface="Trebuchet MS" pitchFamily="34" charset="-120"/>
               </a:rPr>
-              <a:t>quickest</a:t>
+              <a:t>quickness</a:t>
             </a:r>
             <a:endParaRPr lang="en-US" sz="2800" dirty="0"/>
           </a:p>
@@ -19870,7 +19948,7 @@
                 <a:ea typeface="Trebuchet MS" pitchFamily="34" charset="-122"/>
                 <a:cs typeface="Trebuchet MS" pitchFamily="34" charset="-120"/>
               </a:rPr>
-              <a:t>est</a:t>
+              <a:t>ness</a:t>
             </a:r>
             <a:endParaRPr lang="en-US" sz="1300" dirty="0"/>
           </a:p>
@@ -19909,7 +19987,7 @@
                 <a:ea typeface="Calibri" pitchFamily="34" charset="-122"/>
                 <a:cs typeface="Calibri" pitchFamily="34" charset="-120"/>
               </a:rPr>
-              <a:t>the most</a:t>
+              <a:t>the state or quality of</a:t>
             </a:r>
             <a:endParaRPr lang="en-US" sz="850" dirty="0"/>
           </a:p>
@@ -20173,7 +20251,7 @@
                 <a:ea typeface="Trebuchet MS" pitchFamily="34" charset="-122"/>
                 <a:cs typeface="Trebuchet MS" pitchFamily="34" charset="-120"/>
               </a:rPr>
-              <a:t>est</a:t>
+              <a:t>ness</a:t>
             </a:r>
             <a:endParaRPr lang="en-US" sz="1400" dirty="0"/>
           </a:p>
@@ -20597,7 +20675,7 @@
                 <a:ea typeface="Calibri" pitchFamily="34" charset="-122"/>
                 <a:cs typeface="Calibri" pitchFamily="34" charset="-120"/>
               </a:rPr>
-              <a:t>Word Labs  •  wordlabs.app  •  Root: 'quick' = fast, speedy, swift</a:t>
+              <a:t>Word Labs  •  wordlabs.app  •  Root: 'quick' = fast, speedy, done rapidly</a:t>
             </a:r>
             <a:endParaRPr lang="en-US" sz="800" dirty="0"/>
           </a:p>
@@ -20736,7 +20814,7 @@
                 <a:ea typeface="Trebuchet MS" pitchFamily="34" charset="-122"/>
                 <a:cs typeface="Trebuchet MS" pitchFamily="34" charset="-120"/>
               </a:rPr>
-              <a:t>quickest</a:t>
+              <a:t>quickness</a:t>
             </a:r>
             <a:endParaRPr lang="en-US" sz="2800" dirty="0"/>
           </a:p>
@@ -20987,7 +21065,7 @@
                 <a:ea typeface="Trebuchet MS" pitchFamily="34" charset="-122"/>
                 <a:cs typeface="Trebuchet MS" pitchFamily="34" charset="-120"/>
               </a:rPr>
-              <a:t>est</a:t>
+              <a:t>ness</a:t>
             </a:r>
             <a:endParaRPr lang="en-US" sz="1300" dirty="0"/>
           </a:p>
@@ -21026,7 +21104,7 @@
                 <a:ea typeface="Calibri" pitchFamily="34" charset="-122"/>
                 <a:cs typeface="Calibri" pitchFamily="34" charset="-120"/>
               </a:rPr>
-              <a:t>the most</a:t>
+              <a:t>the state or quality of</a:t>
             </a:r>
             <a:endParaRPr lang="en-US" sz="850" dirty="0"/>
           </a:p>
@@ -21290,7 +21368,7 @@
                 <a:ea typeface="Trebuchet MS" pitchFamily="34" charset="-122"/>
                 <a:cs typeface="Trebuchet MS" pitchFamily="34" charset="-120"/>
               </a:rPr>
-              <a:t>est</a:t>
+              <a:t>ness</a:t>
             </a:r>
             <a:endParaRPr lang="en-US" sz="1400" dirty="0"/>
           </a:p>
@@ -21628,7 +21706,46 @@
       </p:sp>
       <p:sp>
         <p:nvSpPr>
-          <p:cNvPr id="40" name="Shape 38"/>
+          <p:cNvPr id="40" name="Text 38"/>
+          <p:cNvSpPr/>
+          <p:nvPr/>
+        </p:nvSpPr>
+        <p:spPr>
+          <a:xfrm>
+            <a:off x="4331643" y="4572000"/>
+            <a:ext cx="685800" cy="219456"/>
+          </a:xfrm>
+          <a:prstGeom prst="rect">
+            <a:avLst/>
+          </a:prstGeom>
+          <a:noFill/>
+          <a:ln/>
+        </p:spPr>
+        <p:txBody>
+          <a:bodyPr wrap="square" lIns="0" tIns="0" rIns="0" bIns="0" rtlCol="0" anchor="t"/>
+          <a:lstStyle/>
+          <a:p>
+            <a:pPr algn="ctr" indent="0" marL="0">
+              <a:buNone/>
+            </a:pPr>
+            <a:r>
+              <a:rPr lang="en-US" sz="750" i="1" dirty="0">
+                <a:solidFill>
+                  <a:srgbClr val="94A3B8"/>
+                </a:solidFill>
+                <a:latin typeface="Calibri" pitchFamily="34" charset="0"/>
+                <a:ea typeface="Calibri" pitchFamily="34" charset="-122"/>
+                <a:cs typeface="Calibri" pitchFamily="34" charset="-120"/>
+              </a:rPr>
+              <a:t>/k/</a:t>
+            </a:r>
+            <a:endParaRPr lang="en-US" sz="750" dirty="0"/>
+          </a:p>
+        </p:txBody>
+      </p:sp>
+      <p:sp>
+        <p:nvSpPr>
+          <p:cNvPr id="41" name="Shape 39"/>
           <p:cNvSpPr/>
           <p:nvPr/>
         </p:nvSpPr>
@@ -21655,7 +21772,7 @@
       </p:sp>
       <p:sp>
         <p:nvSpPr>
-          <p:cNvPr id="41" name="Text 39"/>
+          <p:cNvPr id="42" name="Text 40"/>
           <p:cNvSpPr/>
           <p:nvPr/>
         </p:nvSpPr>
@@ -21686,7 +21803,7 @@
                 <a:ea typeface="Trebuchet MS" pitchFamily="34" charset="-122"/>
                 <a:cs typeface="Trebuchet MS" pitchFamily="34" charset="-120"/>
               </a:rPr>
-              <a:t>e</a:t>
+              <a:t>n</a:t>
             </a:r>
             <a:endParaRPr lang="en-US" sz="900" dirty="0"/>
           </a:p>
@@ -21694,7 +21811,7 @@
       </p:sp>
       <p:sp>
         <p:nvSpPr>
-          <p:cNvPr id="42" name="Shape 40"/>
+          <p:cNvPr id="43" name="Shape 41"/>
           <p:cNvSpPr/>
           <p:nvPr/>
         </p:nvSpPr>
@@ -21721,7 +21838,7 @@
       </p:sp>
       <p:sp>
         <p:nvSpPr>
-          <p:cNvPr id="43" name="Text 41"/>
+          <p:cNvPr id="44" name="Text 42"/>
           <p:cNvSpPr/>
           <p:nvPr/>
         </p:nvSpPr>
@@ -21752,7 +21869,7 @@
                 <a:ea typeface="Trebuchet MS" pitchFamily="34" charset="-122"/>
                 <a:cs typeface="Trebuchet MS" pitchFamily="34" charset="-120"/>
               </a:rPr>
-              <a:t>s</a:t>
+              <a:t>e</a:t>
             </a:r>
             <a:endParaRPr lang="en-US" sz="900" dirty="0"/>
           </a:p>
@@ -21760,7 +21877,7 @@
       </p:sp>
       <p:sp>
         <p:nvSpPr>
-          <p:cNvPr id="44" name="Shape 42"/>
+          <p:cNvPr id="45" name="Shape 43"/>
           <p:cNvSpPr/>
           <p:nvPr/>
         </p:nvSpPr>
@@ -21787,7 +21904,7 @@
       </p:sp>
       <p:sp>
         <p:nvSpPr>
-          <p:cNvPr id="45" name="Text 43"/>
+          <p:cNvPr id="46" name="Text 44"/>
           <p:cNvSpPr/>
           <p:nvPr/>
         </p:nvSpPr>
@@ -21818,9 +21935,48 @@
                 <a:ea typeface="Trebuchet MS" pitchFamily="34" charset="-122"/>
                 <a:cs typeface="Trebuchet MS" pitchFamily="34" charset="-120"/>
               </a:rPr>
-              <a:t>t</a:t>
+              <a:t>ss</a:t>
             </a:r>
             <a:endParaRPr lang="en-US" sz="900" dirty="0"/>
+          </a:p>
+        </p:txBody>
+      </p:sp>
+      <p:sp>
+        <p:nvSpPr>
+          <p:cNvPr id="47" name="Text 45"/>
+          <p:cNvSpPr/>
+          <p:nvPr/>
+        </p:nvSpPr>
+        <p:spPr>
+          <a:xfrm>
+            <a:off x="7447135" y="4572000"/>
+            <a:ext cx="685800" cy="219456"/>
+          </a:xfrm>
+          <a:prstGeom prst="rect">
+            <a:avLst/>
+          </a:prstGeom>
+          <a:noFill/>
+          <a:ln/>
+        </p:spPr>
+        <p:txBody>
+          <a:bodyPr wrap="square" lIns="0" tIns="0" rIns="0" bIns="0" rtlCol="0" anchor="t"/>
+          <a:lstStyle/>
+          <a:p>
+            <a:pPr algn="ctr" indent="0" marL="0">
+              <a:buNone/>
+            </a:pPr>
+            <a:r>
+              <a:rPr lang="en-US" sz="750" i="1" dirty="0">
+                <a:solidFill>
+                  <a:srgbClr val="94A3B8"/>
+                </a:solidFill>
+                <a:latin typeface="Calibri" pitchFamily="34" charset="0"/>
+                <a:ea typeface="Calibri" pitchFamily="34" charset="-122"/>
+                <a:cs typeface="Calibri" pitchFamily="34" charset="-120"/>
+              </a:rPr>
+              <a:t>/s/</a:t>
+            </a:r>
+            <a:endParaRPr lang="en-US" sz="750" dirty="0"/>
           </a:p>
         </p:txBody>
       </p:sp>
@@ -22110,7 +22266,7 @@
                 <a:ea typeface="Calibri" pitchFamily="34" charset="-122"/>
                 <a:cs typeface="Calibri" pitchFamily="34" charset="-120"/>
               </a:rPr>
-              <a:t>Word Labs  •  wordlabs.app  •  Root: 'quick' = fast, speedy, swift</a:t>
+              <a:t>Word Labs  •  wordlabs.app  •  Root: 'quick' = fast, speedy, done rapidly</a:t>
             </a:r>
             <a:endParaRPr lang="en-US" sz="800" dirty="0"/>
           </a:p>
@@ -22249,7 +22405,7 @@
                 <a:ea typeface="Trebuchet MS" pitchFamily="34" charset="-122"/>
                 <a:cs typeface="Trebuchet MS" pitchFamily="34" charset="-120"/>
               </a:rPr>
-              <a:t>quickened</a:t>
+              <a:t>quick-witted</a:t>
             </a:r>
             <a:endParaRPr lang="en-US" sz="2800" dirty="0"/>
           </a:p>
@@ -22937,7 +23093,7 @@
                 <a:ea typeface="Calibri" pitchFamily="34" charset="-122"/>
                 <a:cs typeface="Calibri" pitchFamily="34" charset="-120"/>
               </a:rPr>
-              <a:t>Word Labs  •  wordlabs.app  •  Root: 'quick' = fast, speedy, swift</a:t>
+              <a:t>Word Labs  •  wordlabs.app  •  Root: 'quick' = fast, speedy, done rapidly</a:t>
             </a:r>
             <a:endParaRPr lang="en-US" sz="800" dirty="0"/>
           </a:p>
@@ -23076,7 +23232,7 @@
                 <a:ea typeface="Trebuchet MS" pitchFamily="34" charset="-122"/>
                 <a:cs typeface="Trebuchet MS" pitchFamily="34" charset="-120"/>
               </a:rPr>
-              <a:t>quickened</a:t>
+              <a:t>quick-witted</a:t>
             </a:r>
             <a:endParaRPr lang="en-US" sz="2800" dirty="0"/>
           </a:p>
@@ -23327,7 +23483,7 @@
                 <a:ea typeface="Trebuchet MS" pitchFamily="34" charset="-122"/>
                 <a:cs typeface="Trebuchet MS" pitchFamily="34" charset="-120"/>
               </a:rPr>
-              <a:t>en</a:t>
+              <a:t>witt</a:t>
             </a:r>
             <a:endParaRPr lang="en-US" sz="1300" dirty="0"/>
           </a:p>
@@ -23366,7 +23522,7 @@
                 <a:ea typeface="Calibri" pitchFamily="34" charset="-122"/>
                 <a:cs typeface="Calibri" pitchFamily="34" charset="-120"/>
               </a:rPr>
-              <a:t>to make or become</a:t>
+              <a:t>clever thought</a:t>
             </a:r>
             <a:endParaRPr lang="en-US" sz="850" dirty="0"/>
           </a:p>
@@ -23478,7 +23634,7 @@
                 <a:ea typeface="Calibri" pitchFamily="34" charset="-122"/>
                 <a:cs typeface="Calibri" pitchFamily="34" charset="-120"/>
               </a:rPr>
-              <a:t>past tense</a:t>
+              <a:t>having a quality</a:t>
             </a:r>
             <a:endParaRPr lang="en-US" sz="850" dirty="0"/>
           </a:p>
@@ -24034,7 +24190,7 @@
                 <a:ea typeface="Calibri" pitchFamily="34" charset="-122"/>
                 <a:cs typeface="Calibri" pitchFamily="34" charset="-120"/>
               </a:rPr>
-              <a:t>Word Labs  •  wordlabs.app  •  Root: 'quick' = fast, speedy, swift</a:t>
+              <a:t>Word Labs  •  wordlabs.app  •  Root: 'quick' = fast, speedy, done rapidly</a:t>
             </a:r>
             <a:endParaRPr lang="en-US" sz="800" dirty="0"/>
           </a:p>
@@ -24107,7 +24263,7 @@
                 <a:ea typeface="Trebuchet MS" pitchFamily="34" charset="-122"/>
                 <a:cs typeface="Trebuchet MS" pitchFamily="34" charset="-120"/>
               </a:rPr>
-              <a:t>We are learning that the root 'quick' means 'fast, speedy, swift'.</a:t>
+              <a:t>We are learning that the root 'quick' means 'fast, speedy, done rapidly'.</a:t>
             </a:r>
             <a:endParaRPr lang="en-US" sz="2000" dirty="0"/>
           </a:p>
@@ -24753,7 +24909,7 @@
                 <a:ea typeface="Calibri" pitchFamily="34" charset="-122"/>
                 <a:cs typeface="Calibri" pitchFamily="34" charset="-120"/>
               </a:rPr>
-              <a:t>Word Labs  •  wordlabs.app  •  Root: 'quick' = fast, speedy, swift</a:t>
+              <a:t>Word Labs  •  wordlabs.app  •  Root: 'quick' = fast, speedy, done rapidly</a:t>
             </a:r>
             <a:endParaRPr lang="en-US" sz="800" dirty="0"/>
           </a:p>
@@ -24892,7 +25048,7 @@
                 <a:ea typeface="Trebuchet MS" pitchFamily="34" charset="-122"/>
                 <a:cs typeface="Trebuchet MS" pitchFamily="34" charset="-120"/>
               </a:rPr>
-              <a:t>quickened</a:t>
+              <a:t>quick-witted</a:t>
             </a:r>
             <a:endParaRPr lang="en-US" sz="2800" dirty="0"/>
           </a:p>
@@ -25143,7 +25299,7 @@
                 <a:ea typeface="Trebuchet MS" pitchFamily="34" charset="-122"/>
                 <a:cs typeface="Trebuchet MS" pitchFamily="34" charset="-120"/>
               </a:rPr>
-              <a:t>en</a:t>
+              <a:t>witt</a:t>
             </a:r>
             <a:endParaRPr lang="en-US" sz="1300" dirty="0"/>
           </a:p>
@@ -25182,7 +25338,7 @@
                 <a:ea typeface="Calibri" pitchFamily="34" charset="-122"/>
                 <a:cs typeface="Calibri" pitchFamily="34" charset="-120"/>
               </a:rPr>
-              <a:t>to make or become</a:t>
+              <a:t>clever thought</a:t>
             </a:r>
             <a:endParaRPr lang="en-US" sz="850" dirty="0"/>
           </a:p>
@@ -25294,7 +25450,7 @@
                 <a:ea typeface="Calibri" pitchFamily="34" charset="-122"/>
                 <a:cs typeface="Calibri" pitchFamily="34" charset="-120"/>
               </a:rPr>
-              <a:t>past tense</a:t>
+              <a:t>having a quality</a:t>
             </a:r>
             <a:endParaRPr lang="en-US" sz="850" dirty="0"/>
           </a:p>
@@ -25453,7 +25609,7 @@
                 <a:ea typeface="Trebuchet MS" pitchFamily="34" charset="-122"/>
                 <a:cs typeface="Trebuchet MS" pitchFamily="34" charset="-120"/>
               </a:rPr>
-              <a:t>quick</a:t>
+              <a:t>quick-wit</a:t>
             </a:r>
             <a:endParaRPr lang="en-US" sz="1400" dirty="0"/>
           </a:p>
@@ -25558,7 +25714,7 @@
                 <a:ea typeface="Trebuchet MS" pitchFamily="34" charset="-122"/>
                 <a:cs typeface="Trebuchet MS" pitchFamily="34" charset="-120"/>
               </a:rPr>
-              <a:t>ened</a:t>
+              <a:t>ted</a:t>
             </a:r>
             <a:endParaRPr lang="en-US" sz="1400" dirty="0"/>
           </a:p>
@@ -25982,7 +26138,7 @@
                 <a:ea typeface="Calibri" pitchFamily="34" charset="-122"/>
                 <a:cs typeface="Calibri" pitchFamily="34" charset="-120"/>
               </a:rPr>
-              <a:t>Word Labs  •  wordlabs.app  •  Root: 'quick' = fast, speedy, swift</a:t>
+              <a:t>Word Labs  •  wordlabs.app  •  Root: 'quick' = fast, speedy, done rapidly</a:t>
             </a:r>
             <a:endParaRPr lang="en-US" sz="800" dirty="0"/>
           </a:p>
@@ -26121,7 +26277,7 @@
                 <a:ea typeface="Trebuchet MS" pitchFamily="34" charset="-122"/>
                 <a:cs typeface="Trebuchet MS" pitchFamily="34" charset="-120"/>
               </a:rPr>
-              <a:t>quickened</a:t>
+              <a:t>quick-witted</a:t>
             </a:r>
             <a:endParaRPr lang="en-US" sz="2800" dirty="0"/>
           </a:p>
@@ -26372,7 +26528,7 @@
                 <a:ea typeface="Trebuchet MS" pitchFamily="34" charset="-122"/>
                 <a:cs typeface="Trebuchet MS" pitchFamily="34" charset="-120"/>
               </a:rPr>
-              <a:t>en</a:t>
+              <a:t>witt</a:t>
             </a:r>
             <a:endParaRPr lang="en-US" sz="1300" dirty="0"/>
           </a:p>
@@ -26411,7 +26567,7 @@
                 <a:ea typeface="Calibri" pitchFamily="34" charset="-122"/>
                 <a:cs typeface="Calibri" pitchFamily="34" charset="-120"/>
               </a:rPr>
-              <a:t>to make or become</a:t>
+              <a:t>clever thought</a:t>
             </a:r>
             <a:endParaRPr lang="en-US" sz="850" dirty="0"/>
           </a:p>
@@ -26523,7 +26679,7 @@
                 <a:ea typeface="Calibri" pitchFamily="34" charset="-122"/>
                 <a:cs typeface="Calibri" pitchFamily="34" charset="-120"/>
               </a:rPr>
-              <a:t>past tense</a:t>
+              <a:t>having a quality</a:t>
             </a:r>
             <a:endParaRPr lang="en-US" sz="850" dirty="0"/>
           </a:p>
@@ -26682,7 +26838,7 @@
                 <a:ea typeface="Trebuchet MS" pitchFamily="34" charset="-122"/>
                 <a:cs typeface="Trebuchet MS" pitchFamily="34" charset="-120"/>
               </a:rPr>
-              <a:t>quick</a:t>
+              <a:t>quick-wit</a:t>
             </a:r>
             <a:endParaRPr lang="en-US" sz="1400" dirty="0"/>
           </a:p>
@@ -26787,7 +26943,7 @@
                 <a:ea typeface="Trebuchet MS" pitchFamily="34" charset="-122"/>
                 <a:cs typeface="Trebuchet MS" pitchFamily="34" charset="-120"/>
               </a:rPr>
-              <a:t>ened</a:t>
+              <a:t>ted</a:t>
             </a:r>
             <a:endParaRPr lang="en-US" sz="1400" dirty="0"/>
           </a:p>
@@ -26894,8 +27050,8 @@
         </p:nvSpPr>
         <p:spPr>
           <a:xfrm>
-            <a:off x="2124837" y="4169664"/>
-            <a:ext cx="685800" cy="384048"/>
+            <a:off x="1951330" y="4169664"/>
+            <a:ext cx="676656" cy="384048"/>
           </a:xfrm>
           <a:prstGeom prst="rect">
             <a:avLst>
@@ -26921,8 +27077,8 @@
         </p:nvSpPr>
         <p:spPr>
           <a:xfrm>
-            <a:off x="2124837" y="4169664"/>
-            <a:ext cx="685800" cy="384048"/>
+            <a:off x="1951330" y="4169664"/>
+            <a:ext cx="676656" cy="384048"/>
           </a:xfrm>
           <a:prstGeom prst="rect">
             <a:avLst/>
@@ -26960,8 +27116,8 @@
         </p:nvSpPr>
         <p:spPr>
           <a:xfrm>
-            <a:off x="2124837" y="4572000"/>
-            <a:ext cx="685800" cy="219456"/>
+            <a:off x="1951330" y="4572000"/>
+            <a:ext cx="676656" cy="219456"/>
           </a:xfrm>
           <a:prstGeom prst="rect">
             <a:avLst/>
@@ -26999,8 +27155,8 @@
         </p:nvSpPr>
         <p:spPr>
           <a:xfrm>
-            <a:off x="3033522" y="4169664"/>
-            <a:ext cx="685800" cy="384048"/>
+            <a:off x="2677363" y="4169664"/>
+            <a:ext cx="676656" cy="384048"/>
           </a:xfrm>
           <a:prstGeom prst="rect">
             <a:avLst>
@@ -27026,8 +27182,8 @@
         </p:nvSpPr>
         <p:spPr>
           <a:xfrm>
-            <a:off x="3033522" y="4169664"/>
-            <a:ext cx="685800" cy="384048"/>
+            <a:off x="2677363" y="4169664"/>
+            <a:ext cx="676656" cy="384048"/>
           </a:xfrm>
           <a:prstGeom prst="rect">
             <a:avLst/>
@@ -27065,8 +27221,8 @@
         </p:nvSpPr>
         <p:spPr>
           <a:xfrm>
-            <a:off x="3942207" y="4169664"/>
-            <a:ext cx="685800" cy="384048"/>
+            <a:off x="3403397" y="4169664"/>
+            <a:ext cx="676656" cy="384048"/>
           </a:xfrm>
           <a:prstGeom prst="rect">
             <a:avLst>
@@ -27092,8 +27248,8 @@
         </p:nvSpPr>
         <p:spPr>
           <a:xfrm>
-            <a:off x="3942207" y="4169664"/>
-            <a:ext cx="685800" cy="384048"/>
+            <a:off x="3403397" y="4169664"/>
+            <a:ext cx="676656" cy="384048"/>
           </a:xfrm>
           <a:prstGeom prst="rect">
             <a:avLst/>
@@ -27125,14 +27281,53 @@
       </p:sp>
       <p:sp>
         <p:nvSpPr>
-          <p:cNvPr id="43" name="Shape 41"/>
-          <p:cNvSpPr/>
-          <p:nvPr/>
-        </p:nvSpPr>
-        <p:spPr>
-          <a:xfrm>
-            <a:off x="4850892" y="4169664"/>
-            <a:ext cx="685800" cy="384048"/>
+          <p:cNvPr id="43" name="Text 41"/>
+          <p:cNvSpPr/>
+          <p:nvPr/>
+        </p:nvSpPr>
+        <p:spPr>
+          <a:xfrm>
+            <a:off x="3403397" y="4572000"/>
+            <a:ext cx="676656" cy="219456"/>
+          </a:xfrm>
+          <a:prstGeom prst="rect">
+            <a:avLst/>
+          </a:prstGeom>
+          <a:noFill/>
+          <a:ln/>
+        </p:spPr>
+        <p:txBody>
+          <a:bodyPr wrap="square" lIns="0" tIns="0" rIns="0" bIns="0" rtlCol="0" anchor="t"/>
+          <a:lstStyle/>
+          <a:p>
+            <a:pPr algn="ctr" indent="0" marL="0">
+              <a:buNone/>
+            </a:pPr>
+            <a:r>
+              <a:rPr lang="en-US" sz="750" i="1" dirty="0">
+                <a:solidFill>
+                  <a:srgbClr val="94A3B8"/>
+                </a:solidFill>
+                <a:latin typeface="Calibri" pitchFamily="34" charset="0"/>
+                <a:ea typeface="Calibri" pitchFamily="34" charset="-122"/>
+                <a:cs typeface="Calibri" pitchFamily="34" charset="-120"/>
+              </a:rPr>
+              <a:t>/k/</a:t>
+            </a:r>
+            <a:endParaRPr lang="en-US" sz="750" dirty="0"/>
+          </a:p>
+        </p:txBody>
+      </p:sp>
+      <p:sp>
+        <p:nvSpPr>
+          <p:cNvPr id="44" name="Shape 42"/>
+          <p:cNvSpPr/>
+          <p:nvPr/>
+        </p:nvSpPr>
+        <p:spPr>
+          <a:xfrm>
+            <a:off x="4129430" y="4169664"/>
+            <a:ext cx="676656" cy="384048"/>
           </a:xfrm>
           <a:prstGeom prst="rect">
             <a:avLst>
@@ -27152,14 +27347,14 @@
       </p:sp>
       <p:sp>
         <p:nvSpPr>
-          <p:cNvPr id="44" name="Text 42"/>
-          <p:cNvSpPr/>
-          <p:nvPr/>
-        </p:nvSpPr>
-        <p:spPr>
-          <a:xfrm>
-            <a:off x="4850892" y="4169664"/>
-            <a:ext cx="685800" cy="384048"/>
+          <p:cNvPr id="45" name="Text 43"/>
+          <p:cNvSpPr/>
+          <p:nvPr/>
+        </p:nvSpPr>
+        <p:spPr>
+          <a:xfrm>
+            <a:off x="4129430" y="4169664"/>
+            <a:ext cx="676656" cy="384048"/>
           </a:xfrm>
           <a:prstGeom prst="rect">
             <a:avLst/>
@@ -27183,7 +27378,7 @@
                 <a:ea typeface="Trebuchet MS" pitchFamily="34" charset="-122"/>
                 <a:cs typeface="Trebuchet MS" pitchFamily="34" charset="-120"/>
               </a:rPr>
-              <a:t>e</a:t>
+              <a:t>-</a:t>
             </a:r>
             <a:endParaRPr lang="en-US" sz="900" dirty="0"/>
           </a:p>
@@ -27191,14 +27386,14 @@
       </p:sp>
       <p:sp>
         <p:nvSpPr>
-          <p:cNvPr id="45" name="Shape 43"/>
-          <p:cNvSpPr/>
-          <p:nvPr/>
-        </p:nvSpPr>
-        <p:spPr>
-          <a:xfrm>
-            <a:off x="5759577" y="4169664"/>
-            <a:ext cx="685800" cy="384048"/>
+          <p:cNvPr id="46" name="Shape 44"/>
+          <p:cNvSpPr/>
+          <p:nvPr/>
+        </p:nvSpPr>
+        <p:spPr>
+          <a:xfrm>
+            <a:off x="4855464" y="4169664"/>
+            <a:ext cx="676656" cy="384048"/>
           </a:xfrm>
           <a:prstGeom prst="rect">
             <a:avLst>
@@ -27218,14 +27413,14 @@
       </p:sp>
       <p:sp>
         <p:nvSpPr>
-          <p:cNvPr id="46" name="Text 44"/>
-          <p:cNvSpPr/>
-          <p:nvPr/>
-        </p:nvSpPr>
-        <p:spPr>
-          <a:xfrm>
-            <a:off x="5759577" y="4169664"/>
-            <a:ext cx="685800" cy="384048"/>
+          <p:cNvPr id="47" name="Text 45"/>
+          <p:cNvSpPr/>
+          <p:nvPr/>
+        </p:nvSpPr>
+        <p:spPr>
+          <a:xfrm>
+            <a:off x="4855464" y="4169664"/>
+            <a:ext cx="676656" cy="384048"/>
           </a:xfrm>
           <a:prstGeom prst="rect">
             <a:avLst/>
@@ -27249,7 +27444,7 @@
                 <a:ea typeface="Trebuchet MS" pitchFamily="34" charset="-122"/>
                 <a:cs typeface="Trebuchet MS" pitchFamily="34" charset="-120"/>
               </a:rPr>
-              <a:t>n</a:t>
+              <a:t>w</a:t>
             </a:r>
             <a:endParaRPr lang="en-US" sz="900" dirty="0"/>
           </a:p>
@@ -27257,14 +27452,14 @@
       </p:sp>
       <p:sp>
         <p:nvSpPr>
-          <p:cNvPr id="47" name="Shape 45"/>
-          <p:cNvSpPr/>
-          <p:nvPr/>
-        </p:nvSpPr>
-        <p:spPr>
-          <a:xfrm>
-            <a:off x="6668262" y="4169664"/>
-            <a:ext cx="685800" cy="384048"/>
+          <p:cNvPr id="48" name="Shape 46"/>
+          <p:cNvSpPr/>
+          <p:nvPr/>
+        </p:nvSpPr>
+        <p:spPr>
+          <a:xfrm>
+            <a:off x="5581498" y="4169664"/>
+            <a:ext cx="676656" cy="384048"/>
           </a:xfrm>
           <a:prstGeom prst="rect">
             <a:avLst>
@@ -27284,14 +27479,14 @@
       </p:sp>
       <p:sp>
         <p:nvSpPr>
-          <p:cNvPr id="48" name="Text 46"/>
-          <p:cNvSpPr/>
-          <p:nvPr/>
-        </p:nvSpPr>
-        <p:spPr>
-          <a:xfrm>
-            <a:off x="6668262" y="4169664"/>
-            <a:ext cx="685800" cy="384048"/>
+          <p:cNvPr id="49" name="Text 47"/>
+          <p:cNvSpPr/>
+          <p:nvPr/>
+        </p:nvSpPr>
+        <p:spPr>
+          <a:xfrm>
+            <a:off x="5581498" y="4169664"/>
+            <a:ext cx="676656" cy="384048"/>
           </a:xfrm>
           <a:prstGeom prst="rect">
             <a:avLst/>
@@ -27315,7 +27510,7 @@
                 <a:ea typeface="Trebuchet MS" pitchFamily="34" charset="-122"/>
                 <a:cs typeface="Trebuchet MS" pitchFamily="34" charset="-120"/>
               </a:rPr>
-              <a:t>e</a:t>
+              <a:t>i</a:t>
             </a:r>
             <a:endParaRPr lang="en-US" sz="900" dirty="0"/>
           </a:p>
@@ -27323,14 +27518,14 @@
       </p:sp>
       <p:sp>
         <p:nvSpPr>
-          <p:cNvPr id="49" name="Shape 47"/>
-          <p:cNvSpPr/>
-          <p:nvPr/>
-        </p:nvSpPr>
-        <p:spPr>
-          <a:xfrm>
-            <a:off x="7576947" y="4169664"/>
-            <a:ext cx="685800" cy="384048"/>
+          <p:cNvPr id="50" name="Shape 48"/>
+          <p:cNvSpPr/>
+          <p:nvPr/>
+        </p:nvSpPr>
+        <p:spPr>
+          <a:xfrm>
+            <a:off x="6307531" y="4169664"/>
+            <a:ext cx="676656" cy="384048"/>
           </a:xfrm>
           <a:prstGeom prst="rect">
             <a:avLst>
@@ -27350,14 +27545,185 @@
       </p:sp>
       <p:sp>
         <p:nvSpPr>
-          <p:cNvPr id="50" name="Text 48"/>
-          <p:cNvSpPr/>
-          <p:nvPr/>
-        </p:nvSpPr>
-        <p:spPr>
-          <a:xfrm>
-            <a:off x="7576947" y="4169664"/>
-            <a:ext cx="685800" cy="384048"/>
+          <p:cNvPr id="51" name="Text 49"/>
+          <p:cNvSpPr/>
+          <p:nvPr/>
+        </p:nvSpPr>
+        <p:spPr>
+          <a:xfrm>
+            <a:off x="6307531" y="4169664"/>
+            <a:ext cx="676656" cy="384048"/>
+          </a:xfrm>
+          <a:prstGeom prst="rect">
+            <a:avLst/>
+          </a:prstGeom>
+          <a:noFill/>
+          <a:ln/>
+        </p:spPr>
+        <p:txBody>
+          <a:bodyPr wrap="square" lIns="0" tIns="0" rIns="0" bIns="0" rtlCol="0" anchor="ctr"/>
+          <a:lstStyle/>
+          <a:p>
+            <a:pPr algn="ctr" indent="0" marL="0">
+              <a:buNone/>
+            </a:pPr>
+            <a:r>
+              <a:rPr lang="en-US" sz="900" b="1" dirty="0">
+                <a:solidFill>
+                  <a:srgbClr val="9D174D"/>
+                </a:solidFill>
+                <a:latin typeface="Trebuchet MS" pitchFamily="34" charset="0"/>
+                <a:ea typeface="Trebuchet MS" pitchFamily="34" charset="-122"/>
+                <a:cs typeface="Trebuchet MS" pitchFamily="34" charset="-120"/>
+              </a:rPr>
+              <a:t>tt</a:t>
+            </a:r>
+            <a:endParaRPr lang="en-US" sz="900" dirty="0"/>
+          </a:p>
+        </p:txBody>
+      </p:sp>
+      <p:sp>
+        <p:nvSpPr>
+          <p:cNvPr id="52" name="Text 50"/>
+          <p:cNvSpPr/>
+          <p:nvPr/>
+        </p:nvSpPr>
+        <p:spPr>
+          <a:xfrm>
+            <a:off x="6307531" y="4572000"/>
+            <a:ext cx="676656" cy="219456"/>
+          </a:xfrm>
+          <a:prstGeom prst="rect">
+            <a:avLst/>
+          </a:prstGeom>
+          <a:noFill/>
+          <a:ln/>
+        </p:spPr>
+        <p:txBody>
+          <a:bodyPr wrap="square" lIns="0" tIns="0" rIns="0" bIns="0" rtlCol="0" anchor="t"/>
+          <a:lstStyle/>
+          <a:p>
+            <a:pPr algn="ctr" indent="0" marL="0">
+              <a:buNone/>
+            </a:pPr>
+            <a:r>
+              <a:rPr lang="en-US" sz="750" i="1" dirty="0">
+                <a:solidFill>
+                  <a:srgbClr val="94A3B8"/>
+                </a:solidFill>
+                <a:latin typeface="Calibri" pitchFamily="34" charset="0"/>
+                <a:ea typeface="Calibri" pitchFamily="34" charset="-122"/>
+                <a:cs typeface="Calibri" pitchFamily="34" charset="-120"/>
+              </a:rPr>
+              <a:t>/t/</a:t>
+            </a:r>
+            <a:endParaRPr lang="en-US" sz="750" dirty="0"/>
+          </a:p>
+        </p:txBody>
+      </p:sp>
+      <p:sp>
+        <p:nvSpPr>
+          <p:cNvPr id="53" name="Shape 51"/>
+          <p:cNvSpPr/>
+          <p:nvPr/>
+        </p:nvSpPr>
+        <p:spPr>
+          <a:xfrm>
+            <a:off x="7033565" y="4169664"/>
+            <a:ext cx="676656" cy="384048"/>
+          </a:xfrm>
+          <a:prstGeom prst="rect">
+            <a:avLst>
+              <a:gd name="adj" fmla="val 9524"/>
+            </a:avLst>
+          </a:prstGeom>
+          <a:solidFill>
+            <a:srgbClr val="FFFFFF"/>
+          </a:solidFill>
+          <a:ln w="12700">
+            <a:solidFill>
+              <a:srgbClr val="DB2777"/>
+            </a:solidFill>
+            <a:prstDash val="solid"/>
+          </a:ln>
+        </p:spPr>
+      </p:sp>
+      <p:sp>
+        <p:nvSpPr>
+          <p:cNvPr id="54" name="Text 52"/>
+          <p:cNvSpPr/>
+          <p:nvPr/>
+        </p:nvSpPr>
+        <p:spPr>
+          <a:xfrm>
+            <a:off x="7033565" y="4169664"/>
+            <a:ext cx="676656" cy="384048"/>
+          </a:xfrm>
+          <a:prstGeom prst="rect">
+            <a:avLst/>
+          </a:prstGeom>
+          <a:noFill/>
+          <a:ln/>
+        </p:spPr>
+        <p:txBody>
+          <a:bodyPr wrap="square" lIns="0" tIns="0" rIns="0" bIns="0" rtlCol="0" anchor="ctr"/>
+          <a:lstStyle/>
+          <a:p>
+            <a:pPr algn="ctr" indent="0" marL="0">
+              <a:buNone/>
+            </a:pPr>
+            <a:r>
+              <a:rPr lang="en-US" sz="900" b="1" dirty="0">
+                <a:solidFill>
+                  <a:srgbClr val="9D174D"/>
+                </a:solidFill>
+                <a:latin typeface="Trebuchet MS" pitchFamily="34" charset="0"/>
+                <a:ea typeface="Trebuchet MS" pitchFamily="34" charset="-122"/>
+                <a:cs typeface="Trebuchet MS" pitchFamily="34" charset="-120"/>
+              </a:rPr>
+              <a:t>e</a:t>
+            </a:r>
+            <a:endParaRPr lang="en-US" sz="900" dirty="0"/>
+          </a:p>
+        </p:txBody>
+      </p:sp>
+      <p:sp>
+        <p:nvSpPr>
+          <p:cNvPr id="55" name="Shape 53"/>
+          <p:cNvSpPr/>
+          <p:nvPr/>
+        </p:nvSpPr>
+        <p:spPr>
+          <a:xfrm>
+            <a:off x="7759598" y="4169664"/>
+            <a:ext cx="676656" cy="384048"/>
+          </a:xfrm>
+          <a:prstGeom prst="rect">
+            <a:avLst>
+              <a:gd name="adj" fmla="val 9524"/>
+            </a:avLst>
+          </a:prstGeom>
+          <a:solidFill>
+            <a:srgbClr val="FFFFFF"/>
+          </a:solidFill>
+          <a:ln w="12700">
+            <a:solidFill>
+              <a:srgbClr val="DB2777"/>
+            </a:solidFill>
+            <a:prstDash val="solid"/>
+          </a:ln>
+        </p:spPr>
+      </p:sp>
+      <p:sp>
+        <p:nvSpPr>
+          <p:cNvPr id="56" name="Text 54"/>
+          <p:cNvSpPr/>
+          <p:nvPr/>
+        </p:nvSpPr>
+        <p:spPr>
+          <a:xfrm>
+            <a:off x="7759598" y="4169664"/>
+            <a:ext cx="676656" cy="384048"/>
           </a:xfrm>
           <a:prstGeom prst="rect">
             <a:avLst/>
@@ -27673,7 +28039,7 @@
                 <a:ea typeface="Calibri" pitchFamily="34" charset="-122"/>
                 <a:cs typeface="Calibri" pitchFamily="34" charset="-120"/>
               </a:rPr>
-              <a:t>Word Labs  •  wordlabs.app  •  Root: 'quick' = fast, speedy, swift</a:t>
+              <a:t>Word Labs  •  wordlabs.app  •  Root: 'quick' = fast, speedy, done rapidly</a:t>
             </a:r>
             <a:endParaRPr lang="en-US" sz="800" dirty="0"/>
           </a:p>
@@ -27812,7 +28178,7 @@
                 <a:ea typeface="Trebuchet MS" pitchFamily="34" charset="-122"/>
                 <a:cs typeface="Trebuchet MS" pitchFamily="34" charset="-120"/>
               </a:rPr>
-              <a:t>quickly</a:t>
+              <a:t>quicken</a:t>
             </a:r>
             <a:endParaRPr lang="en-US" sz="2800" dirty="0"/>
           </a:p>
@@ -28500,7 +28866,7 @@
                 <a:ea typeface="Calibri" pitchFamily="34" charset="-122"/>
                 <a:cs typeface="Calibri" pitchFamily="34" charset="-120"/>
               </a:rPr>
-              <a:t>Word Labs  •  wordlabs.app  •  Root: 'quick' = fast, speedy, swift</a:t>
+              <a:t>Word Labs  •  wordlabs.app  •  Root: 'quick' = fast, speedy, done rapidly</a:t>
             </a:r>
             <a:endParaRPr lang="en-US" sz="800" dirty="0"/>
           </a:p>
@@ -28639,7 +29005,7 @@
                 <a:ea typeface="Trebuchet MS" pitchFamily="34" charset="-122"/>
                 <a:cs typeface="Trebuchet MS" pitchFamily="34" charset="-120"/>
               </a:rPr>
-              <a:t>quickly</a:t>
+              <a:t>quicken</a:t>
             </a:r>
             <a:endParaRPr lang="en-US" sz="2800" dirty="0"/>
           </a:p>
@@ -28890,7 +29256,7 @@
                 <a:ea typeface="Trebuchet MS" pitchFamily="34" charset="-122"/>
                 <a:cs typeface="Trebuchet MS" pitchFamily="34" charset="-120"/>
               </a:rPr>
-              <a:t>ly</a:t>
+              <a:t>en</a:t>
             </a:r>
             <a:endParaRPr lang="en-US" sz="1300" dirty="0"/>
           </a:p>
@@ -28929,7 +29295,7 @@
                 <a:ea typeface="Calibri" pitchFamily="34" charset="-122"/>
                 <a:cs typeface="Calibri" pitchFamily="34" charset="-120"/>
               </a:rPr>
-              <a:t>in a certain way</a:t>
+              <a:t>to make or become</a:t>
             </a:r>
             <a:endParaRPr lang="en-US" sz="850" dirty="0"/>
           </a:p>
@@ -29485,7 +29851,7 @@
                 <a:ea typeface="Calibri" pitchFamily="34" charset="-122"/>
                 <a:cs typeface="Calibri" pitchFamily="34" charset="-120"/>
               </a:rPr>
-              <a:t>Word Labs  •  wordlabs.app  •  Root: 'quick' = fast, speedy, swift</a:t>
+              <a:t>Word Labs  •  wordlabs.app  •  Root: 'quick' = fast, speedy, done rapidly</a:t>
             </a:r>
             <a:endParaRPr lang="en-US" sz="800" dirty="0"/>
           </a:p>
@@ -29624,7 +29990,7 @@
                 <a:ea typeface="Trebuchet MS" pitchFamily="34" charset="-122"/>
                 <a:cs typeface="Trebuchet MS" pitchFamily="34" charset="-120"/>
               </a:rPr>
-              <a:t>quickly</a:t>
+              <a:t>quicken</a:t>
             </a:r>
             <a:endParaRPr lang="en-US" sz="2800" dirty="0"/>
           </a:p>
@@ -29875,7 +30241,7 @@
                 <a:ea typeface="Trebuchet MS" pitchFamily="34" charset="-122"/>
                 <a:cs typeface="Trebuchet MS" pitchFamily="34" charset="-120"/>
               </a:rPr>
-              <a:t>ly</a:t>
+              <a:t>en</a:t>
             </a:r>
             <a:endParaRPr lang="en-US" sz="1300" dirty="0"/>
           </a:p>
@@ -29914,7 +30280,7 @@
                 <a:ea typeface="Calibri" pitchFamily="34" charset="-122"/>
                 <a:cs typeface="Calibri" pitchFamily="34" charset="-120"/>
               </a:rPr>
-              <a:t>in a certain way</a:t>
+              <a:t>to make or become</a:t>
             </a:r>
             <a:endParaRPr lang="en-US" sz="850" dirty="0"/>
           </a:p>
@@ -30178,7 +30544,7 @@
                 <a:ea typeface="Trebuchet MS" pitchFamily="34" charset="-122"/>
                 <a:cs typeface="Trebuchet MS" pitchFamily="34" charset="-120"/>
               </a:rPr>
-              <a:t>ly</a:t>
+              <a:t>en</a:t>
             </a:r>
             <a:endParaRPr lang="en-US" sz="1400" dirty="0"/>
           </a:p>
@@ -30602,7 +30968,7 @@
                 <a:ea typeface="Calibri" pitchFamily="34" charset="-122"/>
                 <a:cs typeface="Calibri" pitchFamily="34" charset="-120"/>
               </a:rPr>
-              <a:t>Word Labs  •  wordlabs.app  •  Root: 'quick' = fast, speedy, swift</a:t>
+              <a:t>Word Labs  •  wordlabs.app  •  Root: 'quick' = fast, speedy, done rapidly</a:t>
             </a:r>
             <a:endParaRPr lang="en-US" sz="800" dirty="0"/>
           </a:p>
@@ -30741,7 +31107,7 @@
                 <a:ea typeface="Trebuchet MS" pitchFamily="34" charset="-122"/>
                 <a:cs typeface="Trebuchet MS" pitchFamily="34" charset="-120"/>
               </a:rPr>
-              <a:t>quickly</a:t>
+              <a:t>quicken</a:t>
             </a:r>
             <a:endParaRPr lang="en-US" sz="2800" dirty="0"/>
           </a:p>
@@ -30992,7 +31358,7 @@
                 <a:ea typeface="Trebuchet MS" pitchFamily="34" charset="-122"/>
                 <a:cs typeface="Trebuchet MS" pitchFamily="34" charset="-120"/>
               </a:rPr>
-              <a:t>ly</a:t>
+              <a:t>en</a:t>
             </a:r>
             <a:endParaRPr lang="en-US" sz="1300" dirty="0"/>
           </a:p>
@@ -31031,7 +31397,7 @@
                 <a:ea typeface="Calibri" pitchFamily="34" charset="-122"/>
                 <a:cs typeface="Calibri" pitchFamily="34" charset="-120"/>
               </a:rPr>
-              <a:t>in a certain way</a:t>
+              <a:t>to make or become</a:t>
             </a:r>
             <a:endParaRPr lang="en-US" sz="850" dirty="0"/>
           </a:p>
@@ -31295,7 +31661,7 @@
                 <a:ea typeface="Trebuchet MS" pitchFamily="34" charset="-122"/>
                 <a:cs typeface="Trebuchet MS" pitchFamily="34" charset="-120"/>
               </a:rPr>
-              <a:t>ly</a:t>
+              <a:t>en</a:t>
             </a:r>
             <a:endParaRPr lang="en-US" sz="1400" dirty="0"/>
           </a:p>
@@ -31633,7 +31999,46 @@
       </p:sp>
       <p:sp>
         <p:nvSpPr>
-          <p:cNvPr id="40" name="Shape 38"/>
+          <p:cNvPr id="40" name="Text 38"/>
+          <p:cNvSpPr/>
+          <p:nvPr/>
+        </p:nvSpPr>
+        <p:spPr>
+          <a:xfrm>
+            <a:off x="4850892" y="4572000"/>
+            <a:ext cx="685800" cy="219456"/>
+          </a:xfrm>
+          <a:prstGeom prst="rect">
+            <a:avLst/>
+          </a:prstGeom>
+          <a:noFill/>
+          <a:ln/>
+        </p:spPr>
+        <p:txBody>
+          <a:bodyPr wrap="square" lIns="0" tIns="0" rIns="0" bIns="0" rtlCol="0" anchor="t"/>
+          <a:lstStyle/>
+          <a:p>
+            <a:pPr algn="ctr" indent="0" marL="0">
+              <a:buNone/>
+            </a:pPr>
+            <a:r>
+              <a:rPr lang="en-US" sz="750" i="1" dirty="0">
+                <a:solidFill>
+                  <a:srgbClr val="94A3B8"/>
+                </a:solidFill>
+                <a:latin typeface="Calibri" pitchFamily="34" charset="0"/>
+                <a:ea typeface="Calibri" pitchFamily="34" charset="-122"/>
+                <a:cs typeface="Calibri" pitchFamily="34" charset="-120"/>
+              </a:rPr>
+              <a:t>/k/</a:t>
+            </a:r>
+            <a:endParaRPr lang="en-US" sz="750" dirty="0"/>
+          </a:p>
+        </p:txBody>
+      </p:sp>
+      <p:sp>
+        <p:nvSpPr>
+          <p:cNvPr id="41" name="Shape 39"/>
           <p:cNvSpPr/>
           <p:nvPr/>
         </p:nvSpPr>
@@ -31660,7 +32065,7 @@
       </p:sp>
       <p:sp>
         <p:nvSpPr>
-          <p:cNvPr id="41" name="Text 39"/>
+          <p:cNvPr id="42" name="Text 40"/>
           <p:cNvSpPr/>
           <p:nvPr/>
         </p:nvSpPr>
@@ -31691,7 +32096,7 @@
                 <a:ea typeface="Trebuchet MS" pitchFamily="34" charset="-122"/>
                 <a:cs typeface="Trebuchet MS" pitchFamily="34" charset="-120"/>
               </a:rPr>
-              <a:t>l</a:t>
+              <a:t>e</a:t>
             </a:r>
             <a:endParaRPr lang="en-US" sz="900" dirty="0"/>
           </a:p>
@@ -31699,7 +32104,7 @@
       </p:sp>
       <p:sp>
         <p:nvSpPr>
-          <p:cNvPr id="42" name="Shape 40"/>
+          <p:cNvPr id="43" name="Shape 41"/>
           <p:cNvSpPr/>
           <p:nvPr/>
         </p:nvSpPr>
@@ -31726,7 +32131,7 @@
       </p:sp>
       <p:sp>
         <p:nvSpPr>
-          <p:cNvPr id="43" name="Text 41"/>
+          <p:cNvPr id="44" name="Text 42"/>
           <p:cNvSpPr/>
           <p:nvPr/>
         </p:nvSpPr>
@@ -31757,7 +32162,7 @@
                 <a:ea typeface="Trebuchet MS" pitchFamily="34" charset="-122"/>
                 <a:cs typeface="Trebuchet MS" pitchFamily="34" charset="-120"/>
               </a:rPr>
-              <a:t>y</a:t>
+              <a:t>n</a:t>
             </a:r>
             <a:endParaRPr lang="en-US" sz="900" dirty="0"/>
           </a:p>
@@ -32049,7 +32454,7 @@
                 <a:ea typeface="Calibri" pitchFamily="34" charset="-122"/>
                 <a:cs typeface="Calibri" pitchFamily="34" charset="-120"/>
               </a:rPr>
-              <a:t>Word Labs  •  wordlabs.app  •  Root: 'quick' = fast, speedy, swift</a:t>
+              <a:t>Word Labs  •  wordlabs.app  •  Root: 'quick' = fast, speedy, done rapidly</a:t>
             </a:r>
             <a:endParaRPr lang="en-US" sz="800" dirty="0"/>
           </a:p>
@@ -33218,7 +33623,7 @@
                 <a:ea typeface="Calibri" pitchFamily="34" charset="-122"/>
                 <a:cs typeface="Calibri" pitchFamily="34" charset="-120"/>
               </a:rPr>
-              <a:t>Word Labs  •  wordlabs.app  •  Root: 'quick' = fast, speedy, swift</a:t>
+              <a:t>Word Labs  •  wordlabs.app  •  Root: 'quick' = fast, speedy, done rapidly</a:t>
             </a:r>
             <a:endParaRPr lang="en-US" sz="800" dirty="0"/>
           </a:p>
@@ -33519,7 +33924,7 @@
                 <a:ea typeface="Trebuchet MS" pitchFamily="34" charset="-122"/>
                 <a:cs typeface="Trebuchet MS" pitchFamily="34" charset="-120"/>
               </a:rPr>
-              <a:t>re-</a:t>
+              <a:t>non-</a:t>
             </a:r>
             <a:endParaRPr lang="en-US" sz="1300" dirty="0"/>
           </a:p>
@@ -33711,7 +34116,7 @@
                 <a:ea typeface="Trebuchet MS" pitchFamily="34" charset="-122"/>
                 <a:cs typeface="Trebuchet MS" pitchFamily="34" charset="-120"/>
               </a:rPr>
-              <a:t>non-</a:t>
+              <a:t>semi-</a:t>
             </a:r>
             <a:endParaRPr lang="en-US" sz="1300" dirty="0"/>
           </a:p>
@@ -33800,7 +34205,7 @@
                 <a:ea typeface="Trebuchet MS" pitchFamily="34" charset="-122"/>
                 <a:cs typeface="Trebuchet MS" pitchFamily="34" charset="-120"/>
               </a:rPr>
-              <a:t>-ness</a:t>
+              <a:t>-er</a:t>
             </a:r>
             <a:endParaRPr lang="en-US" sz="1300" dirty="0"/>
           </a:p>
@@ -33864,7 +34269,7 @@
                 <a:ea typeface="Trebuchet MS" pitchFamily="34" charset="-122"/>
                 <a:cs typeface="Trebuchet MS" pitchFamily="34" charset="-120"/>
               </a:rPr>
-              <a:t>un-</a:t>
+              <a:t>over-</a:t>
             </a:r>
             <a:endParaRPr lang="en-US" sz="1300" dirty="0"/>
           </a:p>
@@ -33953,7 +34358,7 @@
                 <a:ea typeface="Trebuchet MS" pitchFamily="34" charset="-122"/>
                 <a:cs typeface="Trebuchet MS" pitchFamily="34" charset="-120"/>
               </a:rPr>
-              <a:t>-er</a:t>
+              <a:t>-est</a:t>
             </a:r>
             <a:endParaRPr lang="en-US" sz="1300" dirty="0"/>
           </a:p>
@@ -34017,7 +34422,7 @@
                 <a:ea typeface="Trebuchet MS" pitchFamily="34" charset="-122"/>
                 <a:cs typeface="Trebuchet MS" pitchFamily="34" charset="-120"/>
               </a:rPr>
-              <a:t>semi-</a:t>
+              <a:t>out-</a:t>
             </a:r>
             <a:endParaRPr lang="en-US" sz="1300" dirty="0"/>
           </a:p>
@@ -34106,7 +34511,7 @@
                 <a:ea typeface="Trebuchet MS" pitchFamily="34" charset="-122"/>
                 <a:cs typeface="Trebuchet MS" pitchFamily="34" charset="-120"/>
               </a:rPr>
-              <a:t>-est</a:t>
+              <a:t>-en</a:t>
             </a:r>
             <a:endParaRPr lang="en-US" sz="1300" dirty="0"/>
           </a:p>
@@ -34170,7 +34575,7 @@
                 <a:ea typeface="Trebuchet MS" pitchFamily="34" charset="-122"/>
                 <a:cs typeface="Trebuchet MS" pitchFamily="34" charset="-120"/>
               </a:rPr>
-              <a:t>super-</a:t>
+              <a:t>un-</a:t>
             </a:r>
             <a:endParaRPr lang="en-US" sz="1300" dirty="0"/>
           </a:p>
@@ -34259,7 +34664,7 @@
                 <a:ea typeface="Trebuchet MS" pitchFamily="34" charset="-122"/>
                 <a:cs typeface="Trebuchet MS" pitchFamily="34" charset="-120"/>
               </a:rPr>
-              <a:t>-en</a:t>
+              <a:t>-ness</a:t>
             </a:r>
             <a:endParaRPr lang="en-US" sz="1300" dirty="0"/>
           </a:p>
@@ -34430,7 +34835,7 @@
                 <a:ea typeface="Trebuchet MS" pitchFamily="34" charset="-122"/>
                 <a:cs typeface="Trebuchet MS" pitchFamily="34" charset="-120"/>
               </a:rPr>
-              <a:t>quickness</a:t>
+              <a:t>quicker</a:t>
             </a:r>
             <a:endParaRPr lang="en-US" sz="1200" dirty="0"/>
           </a:p>
@@ -34496,7 +34901,7 @@
                 <a:ea typeface="Trebuchet MS" pitchFamily="34" charset="-122"/>
                 <a:cs typeface="Trebuchet MS" pitchFamily="34" charset="-120"/>
               </a:rPr>
-              <a:t>quicker</a:t>
+              <a:t>quickest</a:t>
             </a:r>
             <a:endParaRPr lang="en-US" sz="1200" dirty="0"/>
           </a:p>
@@ -34562,7 +34967,7 @@
                 <a:ea typeface="Trebuchet MS" pitchFamily="34" charset="-122"/>
                 <a:cs typeface="Trebuchet MS" pitchFamily="34" charset="-120"/>
               </a:rPr>
-              <a:t>quickest</a:t>
+              <a:t>quicken</a:t>
             </a:r>
             <a:endParaRPr lang="en-US" sz="1200" dirty="0"/>
           </a:p>
@@ -34628,7 +35033,7 @@
                 <a:ea typeface="Trebuchet MS" pitchFamily="34" charset="-122"/>
                 <a:cs typeface="Trebuchet MS" pitchFamily="34" charset="-120"/>
               </a:rPr>
-              <a:t>quicken</a:t>
+              <a:t>quickness</a:t>
             </a:r>
             <a:endParaRPr lang="en-US" sz="1200" dirty="0"/>
           </a:p>
@@ -34826,7 +35231,7 @@
                 <a:ea typeface="Trebuchet MS" pitchFamily="34" charset="-122"/>
                 <a:cs typeface="Trebuchet MS" pitchFamily="34" charset="-120"/>
               </a:rPr>
-              <a:t>quickfire</a:t>
+              <a:t>quicksilver</a:t>
             </a:r>
             <a:endParaRPr lang="en-US" sz="1200" dirty="0"/>
           </a:p>
@@ -35118,7 +35523,7 @@
                 <a:ea typeface="Calibri" pitchFamily="34" charset="-122"/>
                 <a:cs typeface="Calibri" pitchFamily="34" charset="-120"/>
               </a:rPr>
-              <a:t>Word Labs  •  wordlabs.app  •  Root: 'quick' = fast, speedy, swift</a:t>
+              <a:t>Word Labs  •  wordlabs.app  •  Root: 'quick' = fast, speedy, done rapidly</a:t>
             </a:r>
             <a:endParaRPr lang="en-US" sz="800" dirty="0"/>
           </a:p>
@@ -35282,7 +35687,7 @@
                 <a:ea typeface="Calibri" pitchFamily="34" charset="-122"/>
                 <a:cs typeface="Calibri" pitchFamily="34" charset="-120"/>
               </a:rPr>
-              <a:t>The core part of a word carrying its basic meaning. For example, 'quick' means 'fast, speedy, swift'.</a:t>
+              <a:t>The core part of a word carrying its basic meaning. For example, 'quick' means 'fast, speedy, done rapidly'.</a:t>
             </a:r>
             <a:endParaRPr lang="en-US" sz="1350" dirty="0"/>
           </a:p>
@@ -35902,7 +36307,7 @@
                 <a:ea typeface="Calibri" pitchFamily="34" charset="-122"/>
                 <a:cs typeface="Calibri" pitchFamily="34" charset="-120"/>
               </a:rPr>
-              <a:t>Word Labs  •  wordlabs.app  •  Root: 'quick' = fast, speedy, swift</a:t>
+              <a:t>Word Labs  •  wordlabs.app  •  Root: 'quick' = fast, speedy, done rapidly</a:t>
             </a:r>
             <a:endParaRPr lang="en-US" sz="800" dirty="0"/>
           </a:p>
@@ -36014,7 +36419,7 @@
                 <a:ea typeface="Calibri" pitchFamily="34" charset="-122"/>
                 <a:cs typeface="Calibri" pitchFamily="34" charset="-120"/>
               </a:rPr>
-              <a:t>1.  The word 'quickly' is made by adding the suffix '-ly' to the root 'quick'.</a:t>
+              <a:t>1.  The word 'quicken' means to make something go faster.</a:t>
             </a:r>
             <a:endParaRPr lang="en-US" sz="1300" dirty="0"/>
           </a:p>
@@ -36153,7 +36558,7 @@
                 <a:ea typeface="Calibri" pitchFamily="34" charset="-122"/>
                 <a:cs typeface="Calibri" pitchFamily="34" charset="-120"/>
               </a:rPr>
-              <a:t>2.  The root 'quick' comes from the Latin language.</a:t>
+              <a:t>2.  Adding '-ness' to 'quick' makes the word 'quickness', which is a noun.</a:t>
             </a:r>
             <a:endParaRPr lang="en-US" sz="1300" dirty="0"/>
           </a:p>
@@ -36176,11 +36581,11 @@
             </a:avLst>
           </a:prstGeom>
           <a:solidFill>
-            <a:srgbClr val="FEE2E2"/>
-          </a:solidFill>
-          <a:ln w="12700">
-            <a:solidFill>
-              <a:srgbClr val="DC2626"/>
+            <a:srgbClr val="DCFCE7"/>
+          </a:solidFill>
+          <a:ln w="12700">
+            <a:solidFill>
+              <a:srgbClr val="16A34A"/>
             </a:solidFill>
             <a:prstDash val="solid"/>
           </a:ln>
@@ -36213,13 +36618,13 @@
             <a:r>
               <a:rPr lang="en-US" sz="1100" b="1" dirty="0">
                 <a:solidFill>
-                  <a:srgbClr val="DC2626"/>
+                  <a:srgbClr val="16A34A"/>
                 </a:solidFill>
                 <a:latin typeface="Trebuchet MS" pitchFamily="34" charset="0"/>
                 <a:ea typeface="Trebuchet MS" pitchFamily="34" charset="-122"/>
                 <a:cs typeface="Trebuchet MS" pitchFamily="34" charset="-120"/>
               </a:rPr>
-              <a:t>FALSE</a:t>
+              <a:t>TRUE</a:t>
             </a:r>
             <a:endParaRPr lang="en-US" sz="1100" dirty="0"/>
           </a:p>
@@ -36292,7 +36697,7 @@
                 <a:ea typeface="Calibri" pitchFamily="34" charset="-122"/>
                 <a:cs typeface="Calibri" pitchFamily="34" charset="-120"/>
               </a:rPr>
-              <a:t>3.  The word 'quicken' means to make something go faster.</a:t>
+              <a:t>3.  The word 'quickly' is made by adding the suffix '-ly' to 'quick'.</a:t>
             </a:r>
             <a:endParaRPr lang="en-US" sz="1300" dirty="0"/>
           </a:p>
@@ -36431,7 +36836,7 @@
                 <a:ea typeface="Calibri" pitchFamily="34" charset="-122"/>
                 <a:cs typeface="Calibri" pitchFamily="34" charset="-120"/>
               </a:rPr>
-              <a:t>4.  Adding '-ness' to 'quick' gives us the word 'quickness', which is a noun.</a:t>
+              <a:t>4.  The morpheme 'quick' means slow and careful.</a:t>
             </a:r>
             <a:endParaRPr lang="en-US" sz="1300" dirty="0"/>
           </a:p>
@@ -36454,11 +36859,11 @@
             </a:avLst>
           </a:prstGeom>
           <a:solidFill>
-            <a:srgbClr val="DCFCE7"/>
-          </a:solidFill>
-          <a:ln w="12700">
-            <a:solidFill>
-              <a:srgbClr val="16A34A"/>
+            <a:srgbClr val="FEE2E2"/>
+          </a:solidFill>
+          <a:ln w="12700">
+            <a:solidFill>
+              <a:srgbClr val="DC2626"/>
             </a:solidFill>
             <a:prstDash val="solid"/>
           </a:ln>
@@ -36491,13 +36896,13 @@
             <a:r>
               <a:rPr lang="en-US" sz="1100" b="1" dirty="0">
                 <a:solidFill>
-                  <a:srgbClr val="16A34A"/>
+                  <a:srgbClr val="DC2626"/>
                 </a:solidFill>
                 <a:latin typeface="Trebuchet MS" pitchFamily="34" charset="0"/>
                 <a:ea typeface="Trebuchet MS" pitchFamily="34" charset="-122"/>
                 <a:cs typeface="Trebuchet MS" pitchFamily="34" charset="-120"/>
               </a:rPr>
-              <a:t>TRUE</a:t>
+              <a:t>FALSE</a:t>
             </a:r>
             <a:endParaRPr lang="en-US" sz="1100" dirty="0"/>
           </a:p>
@@ -36570,7 +36975,7 @@
                 <a:ea typeface="Calibri" pitchFamily="34" charset="-122"/>
                 <a:cs typeface="Calibri" pitchFamily="34" charset="-120"/>
               </a:rPr>
-              <a:t>5.  The word 'quicker' means the same as 'quickest'.</a:t>
+              <a:t>5.  The word 'quickest' means slightly faster than usual.</a:t>
             </a:r>
             <a:endParaRPr lang="en-US" sz="1300" dirty="0"/>
           </a:p>
@@ -36928,7 +37333,7 @@
                 <a:ea typeface="Calibri" pitchFamily="34" charset="-122"/>
                 <a:cs typeface="Calibri" pitchFamily="34" charset="-120"/>
               </a:rPr>
-              <a:t>Word Labs  •  wordlabs.app  •  Root: 'quick' = fast, speedy, swift</a:t>
+              <a:t>Word Labs  •  wordlabs.app  •  Root: 'quick' = fast, speedy, done rapidly</a:t>
             </a:r>
             <a:endParaRPr lang="en-US" sz="800" dirty="0"/>
           </a:p>
@@ -37065,7 +37470,7 @@
                 <a:ea typeface="Trebuchet MS" pitchFamily="34" charset="-122"/>
                 <a:cs typeface="Trebuchet MS" pitchFamily="34" charset="-120"/>
               </a:rPr>
-              <a:t>fast, speedy, swift</a:t>
+              <a:t>fast, speedy, done rapidly</a:t>
             </a:r>
             <a:endParaRPr lang="en-US" sz="2000" dirty="0"/>
           </a:p>
@@ -37104,7 +37509,7 @@
                 <a:ea typeface="Calibri" pitchFamily="34" charset="-122"/>
                 <a:cs typeface="Calibri" pitchFamily="34" charset="-120"/>
               </a:rPr>
-              <a:t>Origin: Old English: cwic</a:t>
+              <a:t>Origin: Latin: vivus</a:t>
             </a:r>
             <a:endParaRPr lang="en-US" sz="1100" dirty="0"/>
           </a:p>
@@ -37275,7 +37680,7 @@
                 <a:ea typeface="Trebuchet MS" pitchFamily="34" charset="-122"/>
                 <a:cs typeface="Trebuchet MS" pitchFamily="34" charset="-120"/>
               </a:rPr>
-              <a:t>quickness</a:t>
+              <a:t>quicker</a:t>
             </a:r>
             <a:endParaRPr lang="en-US" sz="1300" dirty="0"/>
           </a:p>
@@ -37341,7 +37746,7 @@
                 <a:ea typeface="Trebuchet MS" pitchFamily="34" charset="-122"/>
                 <a:cs typeface="Trebuchet MS" pitchFamily="34" charset="-120"/>
               </a:rPr>
-              <a:t>quicker</a:t>
+              <a:t>quickest</a:t>
             </a:r>
             <a:endParaRPr lang="en-US" sz="1300" dirty="0"/>
           </a:p>
@@ -37407,7 +37812,7 @@
                 <a:ea typeface="Trebuchet MS" pitchFamily="34" charset="-122"/>
                 <a:cs typeface="Trebuchet MS" pitchFamily="34" charset="-120"/>
               </a:rPr>
-              <a:t>quickest</a:t>
+              <a:t>quicken</a:t>
             </a:r>
             <a:endParaRPr lang="en-US" sz="1300" dirty="0"/>
           </a:p>
@@ -37473,7 +37878,7 @@
                 <a:ea typeface="Trebuchet MS" pitchFamily="34" charset="-122"/>
                 <a:cs typeface="Trebuchet MS" pitchFamily="34" charset="-120"/>
               </a:rPr>
-              <a:t>quicken</a:t>
+              <a:t>quickness</a:t>
             </a:r>
             <a:endParaRPr lang="en-US" sz="1300" dirty="0"/>
           </a:p>
@@ -37897,7 +38302,7 @@
                 <a:ea typeface="Calibri" pitchFamily="34" charset="-122"/>
                 <a:cs typeface="Calibri" pitchFamily="34" charset="-120"/>
               </a:rPr>
-              <a:t>Word Labs  •  wordlabs.app  •  Root: 'quick' = fast, speedy, swift</a:t>
+              <a:t>Word Labs  •  wordlabs.app  •  Root: 'quick' = fast, speedy, done rapidly</a:t>
             </a:r>
             <a:endParaRPr lang="en-US" sz="800" dirty="0"/>
           </a:p>
@@ -38198,7 +38603,7 @@
                 <a:ea typeface="Trebuchet MS" pitchFamily="34" charset="-122"/>
                 <a:cs typeface="Trebuchet MS" pitchFamily="34" charset="-120"/>
               </a:rPr>
-              <a:t>re-</a:t>
+              <a:t>non-</a:t>
             </a:r>
             <a:endParaRPr lang="en-US" sz="1300" dirty="0"/>
           </a:p>
@@ -38390,7 +38795,7 @@
                 <a:ea typeface="Trebuchet MS" pitchFamily="34" charset="-122"/>
                 <a:cs typeface="Trebuchet MS" pitchFamily="34" charset="-120"/>
               </a:rPr>
-              <a:t>non-</a:t>
+              <a:t>semi-</a:t>
             </a:r>
             <a:endParaRPr lang="en-US" sz="1300" dirty="0"/>
           </a:p>
@@ -38479,7 +38884,7 @@
                 <a:ea typeface="Trebuchet MS" pitchFamily="34" charset="-122"/>
                 <a:cs typeface="Trebuchet MS" pitchFamily="34" charset="-120"/>
               </a:rPr>
-              <a:t>-ness</a:t>
+              <a:t>-er</a:t>
             </a:r>
             <a:endParaRPr lang="en-US" sz="1300" dirty="0"/>
           </a:p>
@@ -38543,7 +38948,7 @@
                 <a:ea typeface="Trebuchet MS" pitchFamily="34" charset="-122"/>
                 <a:cs typeface="Trebuchet MS" pitchFamily="34" charset="-120"/>
               </a:rPr>
-              <a:t>un-</a:t>
+              <a:t>over-</a:t>
             </a:r>
             <a:endParaRPr lang="en-US" sz="1300" dirty="0"/>
           </a:p>
@@ -38632,7 +39037,7 @@
                 <a:ea typeface="Trebuchet MS" pitchFamily="34" charset="-122"/>
                 <a:cs typeface="Trebuchet MS" pitchFamily="34" charset="-120"/>
               </a:rPr>
-              <a:t>-er</a:t>
+              <a:t>-est</a:t>
             </a:r>
             <a:endParaRPr lang="en-US" sz="1300" dirty="0"/>
           </a:p>
@@ -38696,7 +39101,7 @@
                 <a:ea typeface="Trebuchet MS" pitchFamily="34" charset="-122"/>
                 <a:cs typeface="Trebuchet MS" pitchFamily="34" charset="-120"/>
               </a:rPr>
-              <a:t>semi-</a:t>
+              <a:t>out-</a:t>
             </a:r>
             <a:endParaRPr lang="en-US" sz="1300" dirty="0"/>
           </a:p>
@@ -38785,7 +39190,7 @@
                 <a:ea typeface="Trebuchet MS" pitchFamily="34" charset="-122"/>
                 <a:cs typeface="Trebuchet MS" pitchFamily="34" charset="-120"/>
               </a:rPr>
-              <a:t>-est</a:t>
+              <a:t>-en</a:t>
             </a:r>
             <a:endParaRPr lang="en-US" sz="1300" dirty="0"/>
           </a:p>
@@ -38849,7 +39254,7 @@
                 <a:ea typeface="Trebuchet MS" pitchFamily="34" charset="-122"/>
                 <a:cs typeface="Trebuchet MS" pitchFamily="34" charset="-120"/>
               </a:rPr>
-              <a:t>super-</a:t>
+              <a:t>un-</a:t>
             </a:r>
             <a:endParaRPr lang="en-US" sz="1300" dirty="0"/>
           </a:p>
@@ -38938,7 +39343,7 @@
                 <a:ea typeface="Trebuchet MS" pitchFamily="34" charset="-122"/>
                 <a:cs typeface="Trebuchet MS" pitchFamily="34" charset="-120"/>
               </a:rPr>
-              <a:t>-en</a:t>
+              <a:t>-ness</a:t>
             </a:r>
             <a:endParaRPr lang="en-US" sz="1300" dirty="0"/>
           </a:p>
@@ -38992,7 +39397,7 @@
         <p:spPr>
           <a:xfrm>
             <a:off x="1508760" y="4178808"/>
-            <a:ext cx="822960" cy="420624"/>
+            <a:ext cx="950976" cy="420624"/>
           </a:xfrm>
           <a:prstGeom prst="rect">
             <a:avLst>
@@ -39026,7 +39431,7 @@
         <p:spPr>
           <a:xfrm>
             <a:off x="1508760" y="4178808"/>
-            <a:ext cx="822960" cy="420624"/>
+            <a:ext cx="950976" cy="420624"/>
           </a:xfrm>
           <a:prstGeom prst="rect">
             <a:avLst/>
@@ -39050,7 +39455,7 @@
                 <a:ea typeface="Trebuchet MS" pitchFamily="34" charset="-122"/>
                 <a:cs typeface="Trebuchet MS" pitchFamily="34" charset="-120"/>
               </a:rPr>
-              <a:t>re-</a:t>
+              <a:t>non-</a:t>
             </a:r>
             <a:endParaRPr lang="en-US" sz="1300" dirty="0"/>
           </a:p>
@@ -39064,7 +39469,7 @@
         </p:nvSpPr>
         <p:spPr>
           <a:xfrm>
-            <a:off x="2359152" y="4178808"/>
+            <a:off x="2487168" y="4178808"/>
             <a:ext cx="320040" cy="420624"/>
           </a:xfrm>
           <a:prstGeom prst="rect">
@@ -39103,7 +39508,7 @@
         </p:nvSpPr>
         <p:spPr>
           <a:xfrm>
-            <a:off x="2706624" y="4178808"/>
+            <a:off x="2834640" y="4178808"/>
             <a:ext cx="1389888" cy="420624"/>
           </a:xfrm>
           <a:prstGeom prst="rect">
@@ -39137,7 +39542,7 @@
         </p:nvSpPr>
         <p:spPr>
           <a:xfrm>
-            <a:off x="2706624" y="4178808"/>
+            <a:off x="2834640" y="4178808"/>
             <a:ext cx="1389888" cy="420624"/>
           </a:xfrm>
           <a:prstGeom prst="rect">
@@ -39176,7 +39581,7 @@
         </p:nvSpPr>
         <p:spPr>
           <a:xfrm>
-            <a:off x="4123944" y="4178808"/>
+            <a:off x="4251960" y="4178808"/>
             <a:ext cx="320040" cy="420624"/>
           </a:xfrm>
           <a:prstGeom prst="rect">
@@ -39215,7 +39620,7 @@
         </p:nvSpPr>
         <p:spPr>
           <a:xfrm>
-            <a:off x="4471416" y="4178808"/>
+            <a:off x="4599432" y="4178808"/>
             <a:ext cx="822960" cy="420624"/>
           </a:xfrm>
           <a:prstGeom prst="rect">
@@ -39249,7 +39654,7 @@
         </p:nvSpPr>
         <p:spPr>
           <a:xfrm>
-            <a:off x="4471416" y="4178808"/>
+            <a:off x="4599432" y="4178808"/>
             <a:ext cx="822960" cy="420624"/>
           </a:xfrm>
           <a:prstGeom prst="rect">
@@ -39288,7 +39693,7 @@
         </p:nvSpPr>
         <p:spPr>
           <a:xfrm>
-            <a:off x="5367528" y="4178808"/>
+            <a:off x="5495544" y="4178808"/>
             <a:ext cx="365760" cy="420624"/>
           </a:xfrm>
           <a:prstGeom prst="rect">
@@ -39327,7 +39732,7 @@
         </p:nvSpPr>
         <p:spPr>
           <a:xfrm>
-            <a:off x="5779008" y="4178808"/>
+            <a:off x="5907024" y="4178808"/>
             <a:ext cx="2194560" cy="420624"/>
           </a:xfrm>
           <a:prstGeom prst="rect">
@@ -39354,7 +39759,7 @@
         </p:nvSpPr>
         <p:spPr>
           <a:xfrm>
-            <a:off x="5779008" y="4178808"/>
+            <a:off x="5907024" y="4178808"/>
             <a:ext cx="2194560" cy="420624"/>
           </a:xfrm>
           <a:prstGeom prst="rect">
@@ -39671,7 +40076,7 @@
                 <a:ea typeface="Calibri" pitchFamily="34" charset="-122"/>
                 <a:cs typeface="Calibri" pitchFamily="34" charset="-120"/>
               </a:rPr>
-              <a:t>Word Labs  •  wordlabs.app  •  Root: 'quick' = fast, speedy, swift</a:t>
+              <a:t>Word Labs  •  wordlabs.app  •  Root: 'quick' = fast, speedy, done rapidly</a:t>
             </a:r>
             <a:endParaRPr lang="en-US" sz="800" dirty="0"/>
           </a:p>
@@ -39849,7 +40254,7 @@
                 <a:ea typeface="Calibri" pitchFamily="34" charset="-122"/>
                 <a:cs typeface="Calibri" pitchFamily="34" charset="-120"/>
               </a:rPr>
-              <a:t>A type of wet, loose sand that can swallow things that step on it.</a:t>
+              <a:t>Wet, loose sand that can suck things down if they stand on it.</a:t>
             </a:r>
             <a:endParaRPr lang="en-US" sz="1200" dirty="0"/>
           </a:p>
@@ -39922,7 +40327,7 @@
                 <a:ea typeface="Trebuchet MS" pitchFamily="34" charset="-122"/>
                 <a:cs typeface="Trebuchet MS" pitchFamily="34" charset="-120"/>
               </a:rPr>
-              <a:t>quickness</a:t>
+              <a:t>quicker</a:t>
             </a:r>
             <a:endParaRPr lang="en-US" sz="1200" dirty="0"/>
           </a:p>
@@ -39988,7 +40393,7 @@
                 <a:ea typeface="Calibri" pitchFamily="34" charset="-122"/>
                 <a:cs typeface="Calibri" pitchFamily="34" charset="-120"/>
               </a:rPr>
-              <a:t>Doing something in a fast way, without wasting time.</a:t>
+              <a:t>Done in a fast way, without taking much time.</a:t>
             </a:r>
             <a:endParaRPr lang="en-US" sz="1200" dirty="0"/>
           </a:p>
@@ -40061,7 +40466,7 @@
                 <a:ea typeface="Trebuchet MS" pitchFamily="34" charset="-122"/>
                 <a:cs typeface="Trebuchet MS" pitchFamily="34" charset="-120"/>
               </a:rPr>
-              <a:t>quicker</a:t>
+              <a:t>quickest</a:t>
             </a:r>
             <a:endParaRPr lang="en-US" sz="1200" dirty="0"/>
           </a:p>
@@ -40127,7 +40532,7 @@
                 <a:ea typeface="Calibri" pitchFamily="34" charset="-122"/>
                 <a:cs typeface="Calibri" pitchFamily="34" charset="-120"/>
               </a:rPr>
-              <a:t>Able to think of clever ideas or answers very fast.</a:t>
+              <a:t>Able to think of clever answers or ideas very fast.</a:t>
             </a:r>
             <a:endParaRPr lang="en-US" sz="1200" dirty="0"/>
           </a:p>
@@ -40200,7 +40605,7 @@
                 <a:ea typeface="Trebuchet MS" pitchFamily="34" charset="-122"/>
                 <a:cs typeface="Trebuchet MS" pitchFamily="34" charset="-120"/>
               </a:rPr>
-              <a:t>quickest</a:t>
+              <a:t>quicken</a:t>
             </a:r>
             <a:endParaRPr lang="en-US" sz="1200" dirty="0"/>
           </a:p>
@@ -40266,7 +40671,7 @@
                 <a:ea typeface="Calibri" pitchFamily="34" charset="-122"/>
                 <a:cs typeface="Calibri" pitchFamily="34" charset="-120"/>
               </a:rPr>
-              <a:t>More fast than something else.</a:t>
+              <a:t>The most fast of all — faster than everything else.</a:t>
             </a:r>
             <a:endParaRPr lang="en-US" sz="1200" dirty="0"/>
           </a:p>
@@ -40339,7 +40744,7 @@
                 <a:ea typeface="Trebuchet MS" pitchFamily="34" charset="-122"/>
                 <a:cs typeface="Trebuchet MS" pitchFamily="34" charset="-120"/>
               </a:rPr>
-              <a:t>quicken</a:t>
+              <a:t>quickness</a:t>
             </a:r>
             <a:endParaRPr lang="en-US" sz="1200" dirty="0"/>
           </a:p>
@@ -40405,7 +40810,7 @@
                 <a:ea typeface="Calibri" pitchFamily="34" charset="-122"/>
                 <a:cs typeface="Calibri" pitchFamily="34" charset="-120"/>
               </a:rPr>
-              <a:t>The most fast of all — faster than everything else.</a:t>
+              <a:t>To make something go faster or speed up.</a:t>
             </a:r>
             <a:endParaRPr lang="en-US" sz="1200" dirty="0"/>
           </a:p>
@@ -40544,7 +40949,7 @@
                 <a:ea typeface="Calibri" pitchFamily="34" charset="-122"/>
                 <a:cs typeface="Calibri" pitchFamily="34" charset="-120"/>
               </a:rPr>
-              <a:t>To make something go faster or speed up.</a:t>
+              <a:t>The quality of being fast or speedy.</a:t>
             </a:r>
             <a:endParaRPr lang="en-US" sz="1200" dirty="0"/>
           </a:p>
@@ -40683,7 +41088,7 @@
                 <a:ea typeface="Calibri" pitchFamily="34" charset="-122"/>
                 <a:cs typeface="Calibri" pitchFamily="34" charset="-120"/>
               </a:rPr>
-              <a:t>The quality of being fast or speedy.</a:t>
+              <a:t>More fast than something else.</a:t>
             </a:r>
             <a:endParaRPr lang="en-US" sz="1200" dirty="0"/>
           </a:p>
@@ -40975,7 +41380,7 @@
                 <a:ea typeface="Calibri" pitchFamily="34" charset="-122"/>
                 <a:cs typeface="Calibri" pitchFamily="34" charset="-120"/>
               </a:rPr>
-              <a:t>Word Labs  •  wordlabs.app  •  Root: 'quick' = fast, speedy, swift</a:t>
+              <a:t>Word Labs  •  wordlabs.app  •  Root: 'quick' = fast, speedy, done rapidly</a:t>
             </a:r>
             <a:endParaRPr lang="en-US" sz="800" dirty="0"/>
           </a:p>
@@ -41178,7 +41583,7 @@
                 <a:ea typeface="Calibri" pitchFamily="34" charset="-122"/>
                 <a:cs typeface="Calibri" pitchFamily="34" charset="-120"/>
               </a:rPr>
-              <a:t>She ran quickly to the other end of the oval before the bell rang.</a:t>
+              <a:t>She ran quickly to the classroom so she would not be late for the lesson.</a:t>
             </a:r>
             <a:endParaRPr lang="en-US" sz="1500" dirty="0"/>
           </a:p>
@@ -41342,7 +41747,7 @@
                 <a:ea typeface="Calibri" pitchFamily="34" charset="-122"/>
                 <a:cs typeface="Calibri" pitchFamily="34" charset="-120"/>
               </a:rPr>
-              <a:t>The quickness of the magician's hands made it impossible to see how the trick worked.</a:t>
+              <a:t>The firefighters needed to quicken their pace when they heard the alarm ringing.</a:t>
             </a:r>
             <a:endParaRPr lang="en-US" sz="1500" dirty="0"/>
           </a:p>
@@ -41506,7 +41911,7 @@
                 <a:ea typeface="Calibri" pitchFamily="34" charset="-122"/>
                 <a:cs typeface="Calibri" pitchFamily="34" charset="-120"/>
               </a:rPr>
-              <a:t>The teacher asked us to quicken our pace so we could finish the activity before lunch.</a:t>
+              <a:t>Of all the students in the race, Maya was the quickest runner on the oval.</a:t>
             </a:r>
             <a:endParaRPr lang="en-US" sz="1500" dirty="0"/>
           </a:p>
